--- a/slides/pptx/lecture07_attention.pptx
+++ b/slides/pptx/lecture07_attention.pptx
@@ -23,7 +23,6 @@
     <p:sldId id="271" r:id="rId23"/>
     <p:sldId id="272" r:id="rId24"/>
     <p:sldId id="273" r:id="rId25"/>
-    <p:sldId id="274" r:id="rId26"/>
   </p:sldIdLst>
   <p:sldSz cx="12191695" cy="6858000" type="screen4x3"/>
   <p:notesSz cx="6858000" cy="9144000"/>
@@ -520,7 +519,7 @@
           <a:lstStyle/>
           <a:p>
             <a:r>
-              <a:t>Monday morning, the first hour of Segment 3 — we leave images behind and pick up SEQUENCES: chromatograms in time, QC across runs, peptides as strings of amino acids. The promise of the hour: by the end you can read an attention heat map and compute an attention output by hand — a weighted average, nothing harder than multiply-and-add. Same interactive spine as Lectures 1, 2, 4 and 5: every worked example (I-do) is followed by one you do yourself (you-do), and every you-do IS a Quiz 7 item. Hand out Quiz 7 now, blank — the room fills it in across the hour, so by the recap the whole sheet is done. Quiz 7 has exactly three items and we hit all three live: read a heat map (Q1), one weighted average (Q2), match the Q/K/V roles (Q3). This hour sets up Lecture 8, where we assemble the full transformer on top of this same lookup.</a:t>
+              <a:t>Monday morning, the first hour of Segment 3 — we leave images behind and pick up SEQUENCES: chromatograms in time, QC across runs, peptides as strings of amino acids. The promise of the hour: by the end you can read an attention heat map and run one attention head by hand — score with a dot product, soften with softmax, blend the values. Same interactive spine as Lectures 1, 2, 4 and 5: every worked example (I-do) is followed by one you do yourself (you-do), and every you-do IS a Quiz 7 item. Hand out Quiz 7 now, blank — the room fills it in across the hour, so by the recap the whole sheet is done. Quiz 7 has two items and we hit both live: read a heat map (Q1) and run one whole attention head end to end (Q2). The query/key/value roles are defined rigorously and then exercised inside Q2's computation. This hour sets up Lecture 8, where we assemble the full transformer on top of this same lookup.</a:t>
             </a:r>
           </a:p>
           <a:p/>
@@ -591,7 +590,7 @@
           <a:lstStyle/>
           <a:p>
             <a:r>
-              <a:t>YOU-DO = Quiz 7 Q3 (the same three phrases, now matched by the room; it assesses the query/key/value outcome). Answer: "what I'm looking for" → QUERY (the question a token asks); "what I contain, so others can decide if I'm relevant" → KEY (the advertisement matched against every query); "what I actually give you once you've decided I'm relevant" → VALUE (the content handed over after a query–key match). Tie it back so it isn't rote: the heat map coming up is Query matched against every Key; the weighted average after it is the Value-mixing step. Take one match from the floor, then have them fill Q3.</a:t>
+              <a:t>The heat map is how attention is visualized and debugged. Rows are query tokens, columns are key tokens, and cell (r,c) is how much token r attends to token c — darker means more, and because the weights are a softmax each row sums to 1. Work the ringed "it" row out loud: 0.60 on "peptide", 0.10–0.15 on the rest (0.15, 0.10, 0.15) — so "it" is attending mostly to "peptide". That is coreference resolution falling out of attention: the model links the pronoun to its referent. This is exactly the query-vs-keys step from the lookup slide, drawn. Next slide the room reads a heat map on a peptide (Quiz 7 Q1).</a:t>
             </a:r>
           </a:p>
           <a:p/>
@@ -662,7 +661,7 @@
           <a:lstStyle/>
           <a:p>
             <a:r>
-              <a:t>The heat map is how attention is visualized and debugged. Rows are query tokens, columns are key tokens, and cell (r,c) is how much token r attends to token c — darker means more, and because the weights are a softmax each row sums to 1. Work the ringed "it" row out loud: 0.60 on "peptide", 0.10–0.15 on the rest (0.15, 0.10, 0.15) — so "it" is attending mostly to "peptide". That is coreference resolution falling out of attention: the model links the pronoun to its referent. This is exactly the query-vs-keys step from the lookup slide, drawn. Next slide the room reads a heat map on a peptide (Quiz 7 Q1).</a:t>
+              <a:t>YOU-DO = Quiz 7 Q1 (same "read the darkest cell" skill, now on a peptide; it assesses the heat-map-reading outcome). The five weights are A 0.05, C 0.05, D 0.35, E 0.45, K 0.10 — they sum to 1. (a) K attends MOST to E (0.45, the darkest cell), with D (0.35) a close second. (b) Chemically sensible because K (lysine) is positively charged (basic) while D and E are negatively charged (acidic) — opposite charges attract, the makings of a salt bridge — so a model trained on real sequences plausibly learns K to "look at" the acidic residues. These numbers are identical to the Quiz 7 Q1 figure and key. Take one answer from the floor, then have them fill Q1(a) and (b).</a:t>
             </a:r>
           </a:p>
           <a:p/>
@@ -733,7 +732,7 @@
           <a:lstStyle/>
           <a:p>
             <a:r>
-              <a:t>YOU-DO = Quiz 7 Q1 (same "read the darkest cell" skill, now on a peptide; it assesses the heat-map-reading outcome). The five weights are A 0.05, C 0.05, D 0.35, E 0.45, K 0.10 — they sum to 1. (a) K attends MOST to E (0.45, the darkest cell), with D (0.35) a close second. (b) Chemically sensible because K (lysine) is positively charged (basic) while D and E are negatively charged (acidic) — opposite charges attract, the makings of a salt bridge — so a model trained on real sequences plausibly learns K to "look at" the acidic residues. These numbers are identical to the Quiz 7 Q1 figure and key. Take one answer from the floor, then have them fill Q1(a) and (b).</a:t>
+              <a:t>State both rules explicitly before any exercise asks for a number (rule 3). Step 1 is softmax — the exact function from Lecture 4, which we already used and quizzed: it takes real-valued scores and returns positive weights that sum to 1, softmaxᵢ = e^{sᵢ} / Σⱼ e^{sⱼ}. Step 2 is the new, hand-computable piece: the output is Σ over tokens of weightᵢ × valueᵢ — literally a weighted average of the value numbers, where a bigger weight means you trust that token's value more. Reassure the room: Σ is just shorthand for "sum the terms," and with three tokens it's three multiply-adds. Next slide we work one all the way through.</a:t>
             </a:r>
           </a:p>
           <a:p/>
@@ -804,7 +803,7 @@
           <a:lstStyle/>
           <a:p>
             <a:r>
-              <a:t>State both rules explicitly before any exercise asks for a number (rule 3). Step 1 is softmax — the exact function from Lecture 4, which we already used and quizzed: it takes real-valued scores and returns positive weights that sum to 1, softmaxᵢ = e^{sᵢ} / Σⱼ e^{sⱼ}. Step 2 is the new, hand-computable piece: the output is Σ over tokens of weightᵢ × valueᵢ — literally a weighted average of the value numbers, where a bigger weight means you trust that token's value more. Reassure the room: Σ is just shorthand for "sum the terms," and with three tokens it's three multiply-adds. Next slide we work one all the way through.</a:t>
+              <a:t>The centerpiece, worked cell by cell — a whole attention head, not just the blend. Step 0, scores are DOT PRODUCTS of the query against each key: q·k₁=(1)(1)+(1)(1)=2, q·k₂=(1)(1)+(1)(0)=1, q·k₃=(1)(2)+(1)(-2)=0. Step 1 is the Lecture 4 softmax on s=(2,1,0): e²=7.39, e¹=2.72, e⁰=1.00, sum 11.11, so 7.39/11.11=0.67, 2.72/11.11=0.24, 1.00/11.11=0.09 (sum 1.00) — the e^x table is on the slide so it is fully hand-computable. Step 2, the weighted average of the values v=(10,4,1): 0.67·10 + 0.24·4 + 0.09·1 = 6.7 + 0.96 + 0.09 = 7.75. Intuition: token 1 scored highest (2) → got the most weight (0.67) → the output sits near its value (10). That is all "paying attention" is. Next slide the room runs a whole head themselves with a new set of keys (Quiz 7 Q2).</a:t>
             </a:r>
           </a:p>
           <a:p/>
@@ -875,7 +874,7 @@
           <a:lstStyle/>
           <a:p>
             <a:r>
-              <a:t>The centerpiece, worked cell by cell. Scores s = (1, 2, 0) go through softmax to weights ≈ (0.24, 0.67, 0.09): e¹=2.72, e²=7.39, e⁰=1.00, sum 11.11, so 2.72/11.11=0.24, 7.39/11.11=0.67, 1.00/11.11=0.09 — and they sum to 1.00. (Softmax needs e^x, so we read those weights off; the WEIGHTED AVERAGE is the exact part we do by hand.) With values v = (5, 10, 0): output = 0.24·5 + 0.67·10 + 0.09·0 = 1.2 + 6.7 + 0 = 7.9. Emphasize the intuition: the answer sits close to token 2's value (10) because token 2 got most of the weight — that's all "paying attention" means, blend the values and trust the high-weight tokens. Next slide the room does one where the weights are handed to them (Quiz 7 Q2).</a:t>
+              <a:t>YOU-DO = Quiz 7 Q2 — a whole head, the same shape as the I-do with new keys. (a) Scores are dot products with q=(1,1): q·(-1,1)=0, q·(1,1)=2, q·(1,0)=1, so s=(0,2,1). (b) Softmax with the e^x table: e⁰=1.00, e²=7.39, e¹=2.72, sum 11.11 → weights 1.00/11.11=0.09, 7.39/11.11=0.67, 2.72/11.11=0.24 (sum 1.00). (c) Values v=(4,9,1): output = 0.09·4 + 0.67·9 + 0.24·1 = 0.36 + 6.03 + 0.24 = 6.63 — pulled toward token 2 (value 9), the highest-weight token. Matches the Quiz 7 Q2 key. Give the room ~3 minutes (this is the whole head), take scores then weights then output from volunteers, then have them fill Q2. That is both Quiz 7 items now worked live.</a:t>
             </a:r>
           </a:p>
           <a:p/>
@@ -946,7 +945,7 @@
           <a:lstStyle/>
           <a:p>
             <a:r>
-              <a:t>YOU-DO = Quiz 7 Q2 (the same weighted average, weights handed over so no softmax needed — purely multiply-add, fully exact). Answer: output = 0.5·4 + 0.3·10 + 0.2·1 = 2 + 3 + 0.2 = 5.2. Read the three contributions: v₂=10 contributes the most to the sum (3.0) even though token 1 has the largest weight (0.5 on v₁=4 → 2.0), because a weighted average balances weight against value. This number is identical to the Quiz 7 Q2 key. Give the room ~90 seconds, take the answer from a volunteer, then have them fill Q2. That is all three Quiz 7 items now worked live.</a:t>
+              <a:t>Real attention runs several lookups at once — "heads." Read the diagram bottom to top: the same Q, K, V are each passed through their own small Linear projection per head, every head runs the identical scaled dot-product attention we just did by hand (scores → softmax → weighted values), and the heads' outputs are concatenated and passed through a final Linear to mix them. Why bother: a single set of weights can only express one notion of "relevant," but language and chemistry have many at once — in a peptide one head might learn charge complementarity (the K↔E pairing from Q1), another might track sequence distance or hydrophobic neighbors. "Scaled" just means the scores are divided by a constant before softmax to keep them well-behaved — a detail, not a new idea. This is a real published diagram; hand-drawn mechanics were ours, canonical architecture is sourced.</a:t>
             </a:r>
           </a:p>
           <a:p/>
@@ -1017,7 +1016,7 @@
           <a:lstStyle/>
           <a:p>
             <a:r>
-              <a:t>Real attention runs several lookups at once — "heads." Read the diagram bottom to top: the same Q, K, V are each passed through their own small Linear projection per head, every head runs the identical scaled dot-product attention we just did by hand (scores → softmax → weighted values), and the heads' outputs are concatenated and passed through a final Linear to mix them. Why bother: a single set of weights can only express one notion of "relevant," but language and chemistry have many at once — in a peptide one head might learn charge complementarity (the K↔E pairing from Q1), another might track sequence distance or hydrophobic neighbors. "Scaled" just means the scores are divided by a constant before softmax to keep them well-behaved — a detail, not a new idea. This is a real published diagram; hand-drawn mechanics were ours, canonical architecture is sourced.</a:t>
+              <a:t>Close the loop opened on the LSTM slide. Left: recurrence is sequential (the hand-offs must happen in order, so no parallelism — long sequences are slow) and long-range signal degrades over many steps (forgetful). Right: self-attention computes every token-pair interaction simultaneously — which maps perfectly onto GPU parallelism and is why transformers train on far more data — and every pair is directly connected, so token 1 and token 500 interact in a single step with no fading. Parallel + long-range: those two wins are the whole reason "Attention Is All You Need" (2017) replaced RNNs and launched the transformer era. Next hour (Lecture 8) we bolt the missing pieces onto this lookup — positions, normalization, the encoder/decoder — and the full transformer falls out.</a:t>
             </a:r>
           </a:p>
           <a:p/>
@@ -1088,7 +1087,7 @@
           <a:lstStyle/>
           <a:p>
             <a:r>
-              <a:t>Close the loop opened on the LSTM slide. Left: recurrence is sequential (the hand-offs must happen in order, so no parallelism — long sequences are slow) and long-range signal degrades over many steps (forgetful). Right: self-attention computes every token-pair interaction simultaneously — which maps perfectly onto GPU parallelism and is why transformers train on far more data — and every pair is directly connected, so token 1 and token 500 interact in a single step with no fading. Parallel + long-range: those two wins are the whole reason "Attention Is All You Need" (2017) replaced RNNs and launched the transformer era. Next hour (Lecture 8) we bolt the missing pieces onto this lookup — positions, normalization, the encoder/decoder — and the full transformer falls out.</a:t>
+              <a:t>Recap = the Lecture 7 outcomes, and each was already a you-do this hour that maps to a Quiz 7 item: Q1 the heat-map read (which residue K attends to most, and why), and Q2 the full attention head (scores = query·key, softmax to weights, output = Σ weight×value = 6.63). The query/key/value roles are defined rigorously on the lookup slide and then exercised inside Q2, so there is no separate role-match item. There is no end-of-class quiz block — they've done both across the hour. Have them keep the sheet; it's the on-ramp to Lecture 8. Then the closing bridge on the last slide.</a:t>
             </a:r>
           </a:p>
           <a:p/>
@@ -1159,77 +1158,6 @@
           <a:lstStyle/>
           <a:p>
             <a:r>
-              <a:t>Recap = the Lecture 7 outcomes, and each was already a you-do this hour that maps to a Quiz 7 item: Q1 the heat-map read (which residue K attends to most, and why), Q2 the weighted-average computation (output = Σ weight×value = 5.2), Q3 the query/key/value role match. There is no separate quiz block — they've done all three across the hour. Have them keep the sheet; it's the on-ramp to Lecture 8. Then the closing bridge on the last slide.</a:t>
-            </a:r>
-          </a:p>
-          <a:p/>
-        </p:txBody>
-      </p:sp>
-      <p:sp>
-        <p:nvSpPr>
-          <p:cNvPr id="4" name="Slide Number Placeholder 3"/>
-          <p:cNvSpPr>
-            <a:spLocks noGrp="1"/>
-          </p:cNvSpPr>
-          <p:nvPr>
-            <p:ph type="sldNum" idx="5" sz="quarter"/>
-          </p:nvPr>
-        </p:nvSpPr>
-        <p:spPr/>
-      </p:sp>
-    </p:spTree>
-  </p:cSld>
-  <p:clrMapOvr>
-    <a:masterClrMapping/>
-  </p:clrMapOvr>
-</p:notes>
-</file>
-
-<file path=ppt/notesSlides/notesSlide19.xml><?xml version="1.0" encoding="utf-8"?>
-<p:notes xmlns:a="http://schemas.openxmlformats.org/drawingml/2006/main" xmlns:p="http://schemas.openxmlformats.org/presentationml/2006/main" xmlns:r="http://schemas.openxmlformats.org/officeDocument/2006/relationships">
-  <p:cSld>
-    <p:spTree>
-      <p:nvGrpSpPr>
-        <p:cNvPr id="1" name=""/>
-        <p:cNvGrpSpPr/>
-        <p:nvPr/>
-      </p:nvGrpSpPr>
-      <p:grpSpPr>
-        <a:xfrm>
-          <a:off x="0" y="0"/>
-          <a:ext cx="0" cy="0"/>
-          <a:chOff x="0" y="0"/>
-          <a:chExt cx="0" cy="0"/>
-        </a:xfrm>
-      </p:grpSpPr>
-      <p:sp>
-        <p:nvSpPr>
-          <p:cNvPr id="2" name="Slide Image Placeholder 1"/>
-          <p:cNvSpPr>
-            <a:spLocks noGrp="1"/>
-          </p:cNvSpPr>
-          <p:nvPr>
-            <p:ph type="sldImg" idx="2"/>
-          </p:nvPr>
-        </p:nvSpPr>
-        <p:spPr/>
-      </p:sp>
-      <p:sp>
-        <p:nvSpPr>
-          <p:cNvPr id="3" name="Notes Placeholder 2"/>
-          <p:cNvSpPr>
-            <a:spLocks noGrp="1"/>
-          </p:cNvSpPr>
-          <p:nvPr>
-            <p:ph type="body" idx="3" sz="quarter"/>
-          </p:nvPr>
-        </p:nvSpPr>
-        <p:spPr/>
-        <p:txBody>
-          <a:bodyPr/>
-          <a:lstStyle/>
-          <a:p>
-            <a:r>
               <a:t>Hand the last minutes to finishing Quiz 7, then sell Lecture 8. Plant the cliffhanger honestly: the attention we built is order-BLIND — nothing in "output = Σ weight×value" depends on which token came first, so shuffling the inputs gives the same output. That's a problem for sequences (recall slide 3 — order is the identity!), and the fix, positional encoding, is exactly where Lecture 8 begins. From there we assemble the full transformer from blocks the room already owns — attention (today), softmax (Lecture 4), residual skips and normalization (Lecture 5) — and then turn it loose on spectra and, in Lab 3, fine-tune a real pretrained model. Then Colab boots and we mark Quiz 7 together.</a:t>
             </a:r>
           </a:p>
@@ -1301,7 +1229,7 @@
           <a:lstStyle/>
           <a:p>
             <a:r>
-              <a:t>Signpost the four stops so people can pace themselves. The middle two blocks are the heart of the hour: tokens/embeddings, then self-attention, which is where all three Quiz 7 items live. The self-attention block alone is ~23 minutes because it carries the numeric mechanic (the weighted average) plus the two heat-map reads. Keep the first block brisk — RNNs are context and a contrast, not the destination. Nothing here needs more than multiply-add; the only new symbol is Σ, and it just means "add up the terms."</a:t>
+              <a:t>Signpost the four stops so people can pace themselves. The middle two blocks are the heart of the hour: tokens/embeddings, then self-attention, which is where both Quiz 7 items live. The self-attention block alone is ~23 minutes because it carries the numeric mechanic (one whole attention head) plus the two heat-map reads. Keep the first block brisk — RNNs are context and a contrast, not the destination. Nothing here needs more than multiply-add; the only new symbol is Σ, and it just means "add up the terms."</a:t>
             </a:r>
           </a:p>
           <a:p/>
@@ -1798,7 +1726,7 @@
           <a:lstStyle/>
           <a:p>
             <a:r>
-              <a:t>Self-attention is a SOFT lookup — like a dictionary lookup, but instead of matching one exact key you match ALL of them a little. Three roles per token, in plain language: the Query is the question this token is asking ("what am I looking for?"); the Key is the advertisement each token puts out ("here's what I contain — decide if I'm relevant"); the Value is the content a token hands over once it's judged relevant. Mechanically: take one token's query, compare it against every token's key to get a compatibility SCORE, softmax the scores into WEIGHTS that sum to 1, then output a weighted average of the VALUES. The heat map on the next slides IS the query-vs-keys step; the weighted average is the value-mixing step. Next slide the room states the three roles themselves (Quiz 7 Q3).</a:t>
+              <a:t>This replaces the old vague "what I'm looking for" wording with the rigorous definition (Vaswani et al. 2017; d2l.ai). The one thing to say clearly: query, key, and value are not three different things a token "has" — they are three LEARNED linear projections of the same token vector, q = x·W_Q, k = x·W_K, v = x·W_V, and the network learns the three weight matrices. Define each by its job in the computation, not by a feeling: the QUERY is the vector this token dots against every other token's KEY; that dot product query·key is a compatibility / relevance score (bigger = more relevant); softmax turns the row of scores into weights that sum to 1; the output is the sum of the VALUE vectors, each weighted by its attention weight. The honest analogy is a database key-value lookup made soft: a hard lookup returns the one value whose key matches; attention returns a weighted blend of ALL values, weighted by how well each key matched the query. Real attention also divides the scores by √d_k before softmax so they don't blow up (we skip that in the hand example). The heat map next IS the query-vs-keys scoring step; the weighted average after it is the value-mixing step — and Quiz 7 Q2 has you run one whole head end to end.</a:t>
             </a:r>
           </a:p>
           <a:p/>
@@ -5068,7 +4996,7 @@
                 </a:solidFill>
                 <a:latin typeface="Menlo"/>
               </a:rPr>
-              <a:t>SELF-ATTENTION · YOUR TURN (YOU-DO = Q3)</a:t>
+              <a:t>SELF-ATTENTION · HEAT MAP · I-DO</a:t>
             </a:r>
           </a:p>
         </p:txBody>
@@ -5082,7 +5010,7 @@
         <p:spPr>
           <a:xfrm>
             <a:off x="548640" y="731520"/>
-            <a:ext cx="11064240" cy="1005840"/>
+            <a:ext cx="11064240" cy="1127760"/>
           </a:xfrm>
           <a:prstGeom prst="rect">
             <a:avLst/>
@@ -5102,14 +5030,14 @@
                 </a:solidFill>
                 <a:latin typeface="Avenir Next"/>
               </a:rPr>
-              <a:t>Match each phrase to its role</a:t>
+              <a:t>Reading a heat map: which token does 'it' look at?</a:t>
             </a:r>
           </a:p>
         </p:txBody>
       </p:sp>
       <p:pic>
         <p:nvPicPr>
-          <p:cNvPr id="5" name="Picture 4" descr="fig_qkv_youdo.png"/>
+          <p:cNvPr id="5" name="Picture 4" descr="fig_attn_heatmap_ido.png"/>
           <p:cNvPicPr>
             <a:picLocks noChangeAspect="1"/>
           </p:cNvPicPr>
@@ -5123,8 +5051,8 @@
         </p:blipFill>
         <p:spPr>
           <a:xfrm>
-            <a:off x="1874195" y="1828800"/>
-            <a:ext cx="8413129" cy="3383280"/>
+            <a:off x="2780000" y="1828800"/>
+            <a:ext cx="6601520" cy="3617976"/>
           </a:xfrm>
           <a:prstGeom prst="rect">
             <a:avLst/>
@@ -5139,7 +5067,7 @@
         </p:nvSpPr>
         <p:spPr>
           <a:xfrm>
-            <a:off x="548640" y="5303520"/>
+            <a:off x="548640" y="5538216"/>
             <a:ext cx="10515600" cy="1182624"/>
           </a:xfrm>
           <a:prstGeom prst="rect">
@@ -5150,7 +5078,7 @@
           </a:solidFill>
           <a:ln w="12700">
             <a:solidFill>
-              <a:srgbClr val="E09E2F"/>
+              <a:srgbClr val="3D444C"/>
             </a:solidFill>
           </a:ln>
           <a:effectLst/>
@@ -5175,22 +5103,13 @@
           <a:p>
             <a:pPr algn="ctr"/>
             <a:r>
-              <a:rPr sz="1200" b="1" i="0">
-                <a:solidFill>
-                  <a:srgbClr val="E09E2F"/>
-                </a:solidFill>
-                <a:latin typeface="Menlo"/>
-              </a:rPr>
-              <a:t>CHECKPOINT · </a:t>
-            </a:r>
-            <a:r>
               <a:rPr sz="1700" b="0" i="0">
                 <a:solidFill>
                   <a:srgbClr val="3D444C"/>
                 </a:solidFill>
                 <a:latin typeface="Avenir Next"/>
               </a:rPr>
-              <a:t>Your turn → Quiz 7, Q3. Match each plain-language phrase to Query, Key, or Value (each used once): 'what I'm looking for' · 'what I contain, so others can decide if I'm relevant' · 'what I actually give you once relevant'. Worked answer in the notes.</a:t>
+              <a:t>Each row is one query token's attention over all key tokens; darker = more; every row sums to 1. Read the 'it' row (ringed): its darkest cell is 'peptide' (0.60). The model has learned that 'it' refers back to 'peptide' — coreference, straight off the picture.</a:t>
             </a:r>
           </a:p>
         </p:txBody>
@@ -5286,7 +5205,7 @@
                 </a:solidFill>
                 <a:latin typeface="Menlo"/>
               </a:rPr>
-              <a:t>SELF-ATTENTION · HEAT MAP · I-DO</a:t>
+              <a:t>SELF-ATTENTION · HEAT MAP · YOUR TURN (YOU-DO = Q1)</a:t>
             </a:r>
           </a:p>
         </p:txBody>
@@ -5320,14 +5239,14 @@
                 </a:solidFill>
                 <a:latin typeface="Avenir Next"/>
               </a:rPr>
-              <a:t>Reading a heat map: which token does 'it' look at?</a:t>
+              <a:t>Your heat map: which residue does K attend to most?</a:t>
             </a:r>
           </a:p>
         </p:txBody>
       </p:sp>
       <p:pic>
         <p:nvPicPr>
-          <p:cNvPr id="5" name="Picture 4" descr="fig_attn_heatmap_ido.png"/>
+          <p:cNvPr id="5" name="Picture 4" descr="fig_attn_heatmap_youdo.png"/>
           <p:cNvPicPr>
             <a:picLocks noChangeAspect="1"/>
           </p:cNvPicPr>
@@ -5341,8 +5260,8 @@
         </p:blipFill>
         <p:spPr>
           <a:xfrm>
-            <a:off x="2780000" y="1828800"/>
-            <a:ext cx="6601520" cy="3617976"/>
+            <a:off x="1785247" y="1828800"/>
+            <a:ext cx="8591026" cy="2926080"/>
           </a:xfrm>
           <a:prstGeom prst="rect">
             <a:avLst/>
@@ -5357,7 +5276,7 @@
         </p:nvSpPr>
         <p:spPr>
           <a:xfrm>
-            <a:off x="548640" y="5538216"/>
+            <a:off x="548640" y="4846320"/>
             <a:ext cx="10515600" cy="1182624"/>
           </a:xfrm>
           <a:prstGeom prst="rect">
@@ -5368,7 +5287,7 @@
           </a:solidFill>
           <a:ln w="12700">
             <a:solidFill>
-              <a:srgbClr val="3D444C"/>
+              <a:srgbClr val="E09E2F"/>
             </a:solidFill>
           </a:ln>
           <a:effectLst/>
@@ -5393,13 +5312,22 @@
           <a:p>
             <a:pPr algn="ctr"/>
             <a:r>
+              <a:rPr sz="1200" b="1" i="0">
+                <a:solidFill>
+                  <a:srgbClr val="E09E2F"/>
+                </a:solidFill>
+                <a:latin typeface="Menlo"/>
+              </a:rPr>
+              <a:t>CHECKPOINT · </a:t>
+            </a:r>
+            <a:r>
               <a:rPr sz="1700" b="0" i="0">
                 <a:solidFill>
                   <a:srgbClr val="3D444C"/>
                 </a:solidFill>
                 <a:latin typeface="Avenir Next"/>
               </a:rPr>
-              <a:t>Each row is one query token's attention over all key tokens; darker = more; every row sums to 1. Read the 'it' row (ringed): its darkest cell is 'peptide' (0.60). The model has learned that 'it' refers back to 'peptide' — coreference, straight off the picture.</a:t>
+              <a:t>Your turn → Quiz 7, Q1. A peptide A-C-D-E-K, tokenized one residue at a time; the row shows how much the last token K attends to each residue (weights sum to 1). (a) Which does K attend to most? (b) Why is that chemically sensible? Worked answer in the notes.</a:t>
             </a:r>
           </a:p>
         </p:txBody>
@@ -5495,7 +5423,7 @@
                 </a:solidFill>
                 <a:latin typeface="Menlo"/>
               </a:rPr>
-              <a:t>SELF-ATTENTION · HEAT MAP · YOUR TURN (YOU-DO = Q1)</a:t>
+              <a:t>SELF-ATTENTION · THE MECHANIC · THE RULE</a:t>
             </a:r>
           </a:p>
         </p:txBody>
@@ -5509,7 +5437,7 @@
         <p:spPr>
           <a:xfrm>
             <a:off x="548640" y="731520"/>
-            <a:ext cx="11064240" cy="1127760"/>
+            <a:ext cx="11064240" cy="1005840"/>
           </a:xfrm>
           <a:prstGeom prst="rect">
             <a:avLst/>
@@ -5529,14 +5457,14 @@
                 </a:solidFill>
                 <a:latin typeface="Avenir Next"/>
               </a:rPr>
-              <a:t>Your heat map: which residue does K attend to most?</a:t>
+              <a:t>The attention output, in two steps</a:t>
             </a:r>
           </a:p>
         </p:txBody>
       </p:sp>
       <p:pic>
         <p:nvPicPr>
-          <p:cNvPr id="5" name="Picture 4" descr="fig_attn_heatmap_youdo.png"/>
+          <p:cNvPr id="5" name="Picture 4" descr="fig_attn_formula.png"/>
           <p:cNvPicPr>
             <a:picLocks noChangeAspect="1"/>
           </p:cNvPicPr>
@@ -5550,8 +5478,8 @@
         </p:blipFill>
         <p:spPr>
           <a:xfrm>
-            <a:off x="1785247" y="1828800"/>
-            <a:ext cx="8591026" cy="2926080"/>
+            <a:off x="2059834" y="1828800"/>
+            <a:ext cx="8041852" cy="3291840"/>
           </a:xfrm>
           <a:prstGeom prst="rect">
             <a:avLst/>
@@ -5566,8 +5494,8 @@
         </p:nvSpPr>
         <p:spPr>
           <a:xfrm>
-            <a:off x="548640" y="4846320"/>
-            <a:ext cx="10515600" cy="1182624"/>
+            <a:off x="548640" y="5212080"/>
+            <a:ext cx="10515600" cy="1441703"/>
           </a:xfrm>
           <a:prstGeom prst="rect">
             <a:avLst/>
@@ -5577,7 +5505,7 @@
           </a:solidFill>
           <a:ln w="12700">
             <a:solidFill>
-              <a:srgbClr val="E09E2F"/>
+              <a:srgbClr val="3D444C"/>
             </a:solidFill>
           </a:ln>
           <a:effectLst/>
@@ -5602,22 +5530,13 @@
           <a:p>
             <a:pPr algn="ctr"/>
             <a:r>
-              <a:rPr sz="1200" b="1" i="0">
-                <a:solidFill>
-                  <a:srgbClr val="E09E2F"/>
-                </a:solidFill>
-                <a:latin typeface="Menlo"/>
-              </a:rPr>
-              <a:t>CHECKPOINT · </a:t>
-            </a:r>
-            <a:r>
               <a:rPr sz="1700" b="0" i="0">
                 <a:solidFill>
                   <a:srgbClr val="3D444C"/>
                 </a:solidFill>
                 <a:latin typeface="Avenir Next"/>
               </a:rPr>
-              <a:t>Your turn → Quiz 7, Q1. A peptide A-C-D-E-K, tokenized one residue at a time; the row shows how much the last token K attends to each residue (weights sum to 1). (a) Which does K attend to most? (b) Why is that chemically sensible? Worked answer in the notes.</a:t>
+              <a:t>Written before you use it (so every number is computable): 0) score sᵢ = q·kᵢ — the dot product of the query with each key (multiply matching components, add). 1) weights = softmax(scores) — the SAME softmax you defined in Lecture 4, turning scores into weights that sum to 1. 2) output = Σ weightᵢ × valueᵢ — a weighted average of the values. That Σ just means 'add the terms.'</a:t>
             </a:r>
           </a:p>
         </p:txBody>
@@ -5713,7 +5632,7 @@
                 </a:solidFill>
                 <a:latin typeface="Menlo"/>
               </a:rPr>
-              <a:t>SELF-ATTENTION · THE MECHANIC · THE RULE</a:t>
+              <a:t>SELF-ATTENTION · THE MECHANIC · I-DO</a:t>
             </a:r>
           </a:p>
         </p:txBody>
@@ -5747,14 +5666,14 @@
                 </a:solidFill>
                 <a:latin typeface="Avenir Next"/>
               </a:rPr>
-              <a:t>The attention output, in two steps</a:t>
+              <a:t>One attention head, worked end to end</a:t>
             </a:r>
           </a:p>
         </p:txBody>
       </p:sp>
       <p:pic>
         <p:nvPicPr>
-          <p:cNvPr id="5" name="Picture 4" descr="fig_attn_formula.png"/>
+          <p:cNvPr id="5" name="Picture 4" descr="fig_attn_head_ido.png"/>
           <p:cNvPicPr>
             <a:picLocks noChangeAspect="1"/>
           </p:cNvPicPr>
@@ -5768,8 +5687,8 @@
         </p:blipFill>
         <p:spPr>
           <a:xfrm>
-            <a:off x="2059834" y="1828800"/>
-            <a:ext cx="8041852" cy="3291840"/>
+            <a:off x="2783126" y="1828800"/>
+            <a:ext cx="6595268" cy="3617976"/>
           </a:xfrm>
           <a:prstGeom prst="rect">
             <a:avLst/>
@@ -5784,7 +5703,7 @@
         </p:nvSpPr>
         <p:spPr>
           <a:xfrm>
-            <a:off x="548640" y="5212080"/>
+            <a:off x="548640" y="5538216"/>
             <a:ext cx="10515600" cy="1182624"/>
           </a:xfrm>
           <a:prstGeom prst="rect">
@@ -5826,7 +5745,7 @@
                 </a:solidFill>
                 <a:latin typeface="Avenir Next"/>
               </a:rPr>
-              <a:t>Written before you use it (so every number is computable): 1) weights = softmax(scores) — the Lecture 4 softmax, turning scores into weights that sum to 1. 2) output = Σ weightᵢ × valueᵢ — a weighted average of the values. That Σ just means 'add the terms.'</a:t>
+              <a:t>Query q=(1,1). Score each token by the dot product q·k: (1,1)·(1,1)=2, (1,1)·(1,0)=1, (1,1)·(2,-2)=0. Softmax(2,1,0) with e²=7.39, e¹=2.72, e⁰=1.00 (sum 11.11) → weights 0.67, 0.24, 0.09. Values 10, 4, 1. output = 0.67·10 + 0.24·4 + 0.09·1 = 7.75 — pulled toward token 1, the highest-weight token.</a:t>
             </a:r>
           </a:p>
         </p:txBody>
@@ -5922,7 +5841,7 @@
                 </a:solidFill>
                 <a:latin typeface="Menlo"/>
               </a:rPr>
-              <a:t>SELF-ATTENTION · THE MECHANIC · I-DO</a:t>
+              <a:t>SELF-ATTENTION · THE MECHANIC · YOUR TURN (YOU-DO = Q2)</a:t>
             </a:r>
           </a:p>
         </p:txBody>
@@ -5956,14 +5875,14 @@
                 </a:solidFill>
                 <a:latin typeface="Avenir Next"/>
               </a:rPr>
-              <a:t>One attention output, worked end to end</a:t>
+              <a:t>Your turn — run a whole head, start to finish</a:t>
             </a:r>
           </a:p>
         </p:txBody>
       </p:sp>
       <p:pic>
         <p:nvPicPr>
-          <p:cNvPr id="5" name="Picture 4" descr="fig_attn_weightedavg_ido.png"/>
+          <p:cNvPr id="5" name="Picture 4" descr="fig_attn_head_youdo.png"/>
           <p:cNvPicPr>
             <a:picLocks noChangeAspect="1"/>
           </p:cNvPicPr>
@@ -5977,8 +5896,8 @@
         </p:blipFill>
         <p:spPr>
           <a:xfrm>
-            <a:off x="1998348" y="1828800"/>
-            <a:ext cx="8164823" cy="3657600"/>
+            <a:off x="2580322" y="1828800"/>
+            <a:ext cx="7000875" cy="3840480"/>
           </a:xfrm>
           <a:prstGeom prst="rect">
             <a:avLst/>
@@ -5993,7 +5912,7 @@
         </p:nvSpPr>
         <p:spPr>
           <a:xfrm>
-            <a:off x="548640" y="5577840"/>
+            <a:off x="548640" y="5760720"/>
             <a:ext cx="10515600" cy="923544"/>
           </a:xfrm>
           <a:prstGeom prst="rect">
@@ -6004,7 +5923,7 @@
           </a:solidFill>
           <a:ln w="12700">
             <a:solidFill>
-              <a:srgbClr val="3D444C"/>
+              <a:srgbClr val="E09E2F"/>
             </a:solidFill>
           </a:ln>
           <a:effectLst/>
@@ -6029,13 +5948,22 @@
           <a:p>
             <a:pPr algn="ctr"/>
             <a:r>
+              <a:rPr sz="1200" b="1" i="0">
+                <a:solidFill>
+                  <a:srgbClr val="E09E2F"/>
+                </a:solidFill>
+                <a:latin typeface="Menlo"/>
+              </a:rPr>
+              <a:t>CHECKPOINT · </a:t>
+            </a:r>
+            <a:r>
               <a:rPr sz="1700" b="0" i="0">
                 <a:solidFill>
                   <a:srgbClr val="3D444C"/>
                 </a:solidFill>
                 <a:latin typeface="Avenir Next"/>
               </a:rPr>
-              <a:t>Three tokens, scores 1, 2, 0. softmax(1,2,0) ≈ 0.24, 0.67, 0.09 (sum 1). Values 5, 10, 0. output = 0.24·5 + 0.67·10 + 0.09·0 = 1.2 + 6.7 + 0 = 7.9. The output leans to token 2 — biggest weight (0.67), value 10 — exactly as a weighted average should.</a:t>
+              <a:t>Your turn → Quiz 7, Q2. Same query q=(1,1), new keys. (a) Score each token, sᵢ = q·kᵢ. (b) Softmax the three scores into weights — use e⁰=1.00, e¹=2.72, e²=7.39. (c) output = Σ wᵢ·vᵢ with values 4, 9, 1. Worked answer in the notes.</a:t>
             </a:r>
           </a:p>
         </p:txBody>
@@ -6131,7 +6059,7 @@
                 </a:solidFill>
                 <a:latin typeface="Menlo"/>
               </a:rPr>
-              <a:t>SELF-ATTENTION · THE MECHANIC · YOUR TURN (YOU-DO = Q2)</a:t>
+              <a:t>SELF-ATTENTION · MORE HEADS</a:t>
             </a:r>
           </a:p>
         </p:txBody>
@@ -6145,7 +6073,7 @@
         <p:spPr>
           <a:xfrm>
             <a:off x="548640" y="731520"/>
-            <a:ext cx="11064240" cy="1127760"/>
+            <a:ext cx="11064240" cy="1005840"/>
           </a:xfrm>
           <a:prstGeom prst="rect">
             <a:avLst/>
@@ -6165,14 +6093,14 @@
                 </a:solidFill>
                 <a:latin typeface="Avenir Next"/>
               </a:rPr>
-              <a:t>Your attention output — weights given, just blend</a:t>
+              <a:t>Multi-head = several lookups in parallel</a:t>
             </a:r>
           </a:p>
         </p:txBody>
       </p:sp>
       <p:pic>
         <p:nvPicPr>
-          <p:cNvPr id="5" name="Picture 4" descr="fig_attn_weightedavg_youdo.png"/>
+          <p:cNvPr id="5" name="Picture 4" descr="multihead_attention.png"/>
           <p:cNvPicPr>
             <a:picLocks noChangeAspect="1"/>
           </p:cNvPicPr>
@@ -6186,8 +6114,8 @@
         </p:blipFill>
         <p:spPr>
           <a:xfrm>
-            <a:off x="1998348" y="1828800"/>
-            <a:ext cx="8164823" cy="3657600"/>
+            <a:off x="4377863" y="1828800"/>
+            <a:ext cx="3405794" cy="3115056"/>
           </a:xfrm>
           <a:prstGeom prst="rect">
             <a:avLst/>
@@ -6196,14 +6124,49 @@
       </p:pic>
       <p:sp>
         <p:nvSpPr>
-          <p:cNvPr id="6" name="Rectangle 5"/>
+          <p:cNvPr id="6" name="TextBox 5"/>
+          <p:cNvSpPr txBox="1"/>
+          <p:nvPr/>
+        </p:nvSpPr>
+        <p:spPr>
+          <a:xfrm>
+            <a:off x="548640" y="4998720"/>
+            <a:ext cx="11064240" cy="411480"/>
+          </a:xfrm>
+          <a:prstGeom prst="rect">
+            <a:avLst/>
+          </a:prstGeom>
+          <a:noFill/>
+        </p:spPr>
+        <p:txBody>
+          <a:bodyPr wrap="square" anchor="t">
+            <a:spAutoFit/>
+          </a:bodyPr>
+          <a:lstStyle/>
+          <a:p>
+            <a:pPr algn="ctr"/>
+            <a:r>
+              <a:rPr sz="1200" b="0" i="1">
+                <a:solidFill>
+                  <a:srgbClr val="8A9099"/>
+                </a:solidFill>
+                <a:latin typeface="Avenir Next"/>
+              </a:rPr>
+              <a:t>multi-head attention · diagram: dvgodoy, Wikimedia Commons, CC BY 4.0</a:t>
+            </a:r>
+          </a:p>
+        </p:txBody>
+      </p:sp>
+      <p:sp>
+        <p:nvSpPr>
+          <p:cNvPr id="7" name="Rectangle 6"/>
           <p:cNvSpPr/>
           <p:nvPr/>
         </p:nvSpPr>
         <p:spPr>
           <a:xfrm>
-            <a:off x="548640" y="5577840"/>
-            <a:ext cx="10515600" cy="923544"/>
+            <a:off x="548640" y="5501640"/>
+            <a:ext cx="10515600" cy="1182624"/>
           </a:xfrm>
           <a:prstGeom prst="rect">
             <a:avLst/>
@@ -6213,7 +6176,7 @@
           </a:solidFill>
           <a:ln w="12700">
             <a:solidFill>
-              <a:srgbClr val="E09E2F"/>
+              <a:srgbClr val="3D444C"/>
             </a:solidFill>
           </a:ln>
           <a:effectLst/>
@@ -6238,22 +6201,13 @@
           <a:p>
             <a:pPr algn="ctr"/>
             <a:r>
-              <a:rPr sz="1200" b="1" i="0">
-                <a:solidFill>
-                  <a:srgbClr val="E09E2F"/>
-                </a:solidFill>
-                <a:latin typeface="Menlo"/>
-              </a:rPr>
-              <a:t>CHECKPOINT · </a:t>
-            </a:r>
-            <a:r>
               <a:rPr sz="1700" b="0" i="0">
                 <a:solidFill>
                   <a:srgbClr val="3D444C"/>
                 </a:solidFill>
                 <a:latin typeface="Avenir Next"/>
               </a:rPr>
-              <a:t>Your turn → Quiz 7, Q2. The weights are given (0.5, 0.3, 0.2 — they sum to 1) and the values are v₁=4, v₂=10, v₃=1. Compute output = 0.5·4 + 0.3·10 + 0.2·1. Worked answer in the notes.</a:t>
+              <a:t>One lookup catches one kind of relationship. Do several in parallel — each 'head' gets its own Query/Key/Value projection (the Linear boxes), runs the same scaled-dot-product attention we just computed, and the results are concatenated and mixed. One head might track charge pairings, another chain position.</a:t>
             </a:r>
           </a:p>
         </p:txBody>
@@ -6349,7 +6303,7 @@
                 </a:solidFill>
                 <a:latin typeface="Menlo"/>
               </a:rPr>
-              <a:t>SELF-ATTENTION · MORE HEADS</a:t>
+              <a:t>WHY ATTENTION WON</a:t>
             </a:r>
           </a:p>
         </p:txBody>
@@ -6363,7 +6317,7 @@
         <p:spPr>
           <a:xfrm>
             <a:off x="548640" y="731520"/>
-            <a:ext cx="11064240" cy="1005840"/>
+            <a:ext cx="11064240" cy="1127760"/>
           </a:xfrm>
           <a:prstGeom prst="rect">
             <a:avLst/>
@@ -6383,14 +6337,14 @@
                 </a:solidFill>
                 <a:latin typeface="Avenir Next"/>
               </a:rPr>
-              <a:t>Multi-head = several lookups in parallel</a:t>
+              <a:t>Parallel and long-range — that's why attention replaced recurrence</a:t>
             </a:r>
           </a:p>
         </p:txBody>
       </p:sp>
       <p:pic>
         <p:nvPicPr>
-          <p:cNvPr id="5" name="Picture 4" descr="multihead_attention.png"/>
+          <p:cNvPr id="5" name="Picture 4" descr="fig_rnn_vs_attention.png"/>
           <p:cNvPicPr>
             <a:picLocks noChangeAspect="1"/>
           </p:cNvPicPr>
@@ -6404,8 +6358,8 @@
         </p:blipFill>
         <p:spPr>
           <a:xfrm>
-            <a:off x="4377863" y="1828800"/>
-            <a:ext cx="3405794" cy="3115056"/>
+            <a:off x="1891145" y="1828800"/>
+            <a:ext cx="8379229" cy="3291840"/>
           </a:xfrm>
           <a:prstGeom prst="rect">
             <a:avLst/>
@@ -6414,59 +6368,24 @@
       </p:pic>
       <p:sp>
         <p:nvSpPr>
-          <p:cNvPr id="6" name="TextBox 5"/>
-          <p:cNvSpPr txBox="1"/>
-          <p:nvPr/>
-        </p:nvSpPr>
-        <p:spPr>
-          <a:xfrm>
-            <a:off x="548640" y="4998720"/>
-            <a:ext cx="11064240" cy="411480"/>
-          </a:xfrm>
-          <a:prstGeom prst="rect">
-            <a:avLst/>
-          </a:prstGeom>
-          <a:noFill/>
-        </p:spPr>
-        <p:txBody>
-          <a:bodyPr wrap="square" anchor="t">
-            <a:spAutoFit/>
-          </a:bodyPr>
-          <a:lstStyle/>
-          <a:p>
-            <a:pPr algn="ctr"/>
-            <a:r>
-              <a:rPr sz="1200" b="0" i="1">
-                <a:solidFill>
-                  <a:srgbClr val="8A9099"/>
-                </a:solidFill>
-                <a:latin typeface="Avenir Next"/>
-              </a:rPr>
-              <a:t>multi-head attention · diagram: dvgodoy, Wikimedia Commons, CC BY 4.0</a:t>
-            </a:r>
-          </a:p>
-        </p:txBody>
-      </p:sp>
-      <p:sp>
-        <p:nvSpPr>
-          <p:cNvPr id="7" name="Rectangle 6"/>
+          <p:cNvPr id="6" name="Rectangle 5"/>
           <p:cNvSpPr/>
           <p:nvPr/>
         </p:nvSpPr>
         <p:spPr>
           <a:xfrm>
-            <a:off x="548640" y="5501640"/>
+            <a:off x="548640" y="5212080"/>
             <a:ext cx="10515600" cy="1182624"/>
           </a:xfrm>
           <a:prstGeom prst="rect">
             <a:avLst/>
           </a:prstGeom>
           <a:solidFill>
-            <a:srgbClr val="F1F1EC"/>
+            <a:srgbClr val="E3F0EF"/>
           </a:solidFill>
           <a:ln w="12700">
             <a:solidFill>
-              <a:srgbClr val="3D444C"/>
+              <a:srgbClr val="0E7C7B"/>
             </a:solidFill>
           </a:ln>
           <a:effectLst/>
@@ -6491,13 +6410,22 @@
           <a:p>
             <a:pPr algn="ctr"/>
             <a:r>
+              <a:rPr sz="1200" b="1" i="0">
+                <a:solidFill>
+                  <a:srgbClr val="0E7C7B"/>
+                </a:solidFill>
+                <a:latin typeface="Menlo"/>
+              </a:rPr>
+              <a:t>MASS SPEC · </a:t>
+            </a:r>
+            <a:r>
               <a:rPr sz="1700" b="0" i="0">
                 <a:solidFill>
                   <a:srgbClr val="3D444C"/>
                 </a:solidFill>
                 <a:latin typeface="Avenir Next"/>
               </a:rPr>
-              <a:t>One lookup catches one kind of relationship. Do several in parallel — each 'head' gets its own Query/Key/Value projection (the Linear boxes), runs the same scaled-dot-product attention we just computed, and the results are concatenated and mixed. One head might track charge pairings, another chain position.</a:t>
+              <a:t>Recurrence (left): token 5 must wait for tokens 1–4 (slow), and early tokens fade over the chain (forgetful). Self-attention (right): all pairs at once (parallel — fast on a GPU) and any two tokens are one hop apart (long-range). Same two problems from the LSTM slide — both solved.</a:t>
             </a:r>
           </a:p>
         </p:txBody>
@@ -6593,7 +6521,7 @@
                 </a:solidFill>
                 <a:latin typeface="Menlo"/>
               </a:rPr>
-              <a:t>WHY ATTENTION WON</a:t>
+              <a:t>LECTURE 7 · WHAT YOU CAN DO NOW</a:t>
             </a:r>
           </a:p>
         </p:txBody>
@@ -6607,7 +6535,7 @@
         <p:spPr>
           <a:xfrm>
             <a:off x="548640" y="731520"/>
-            <a:ext cx="11064240" cy="1127760"/>
+            <a:ext cx="11064240" cy="1005840"/>
           </a:xfrm>
           <a:prstGeom prst="rect">
             <a:avLst/>
@@ -6627,35 +6555,134 @@
                 </a:solidFill>
                 <a:latin typeface="Avenir Next"/>
               </a:rPr>
-              <a:t>Parallel and long-range — that's why attention replaced recurrence</a:t>
-            </a:r>
-          </a:p>
-        </p:txBody>
-      </p:sp>
-      <p:pic>
-        <p:nvPicPr>
-          <p:cNvPr id="5" name="Picture 4" descr="fig_rnn_vs_attention.png"/>
-          <p:cNvPicPr>
-            <a:picLocks noChangeAspect="1"/>
-          </p:cNvPicPr>
+              <a:t>You can now…</a:t>
+            </a:r>
+          </a:p>
+        </p:txBody>
+      </p:sp>
+      <p:sp>
+        <p:nvSpPr>
+          <p:cNvPr id="5" name="TextBox 4"/>
+          <p:cNvSpPr txBox="1"/>
           <p:nvPr/>
-        </p:nvPicPr>
-        <p:blipFill>
-          <a:blip r:embed="rId2"/>
-          <a:stretch>
-            <a:fillRect/>
-          </a:stretch>
-        </p:blipFill>
-        <p:spPr>
-          <a:xfrm>
-            <a:off x="1891145" y="1828800"/>
-            <a:ext cx="8379229" cy="3291840"/>
-          </a:xfrm>
-          <a:prstGeom prst="rect">
-            <a:avLst/>
-          </a:prstGeom>
-        </p:spPr>
-      </p:pic>
+        </p:nvSpPr>
+        <p:spPr>
+          <a:xfrm>
+            <a:off x="548640" y="1920240"/>
+            <a:ext cx="10789920" cy="3322320"/>
+          </a:xfrm>
+          <a:prstGeom prst="rect">
+            <a:avLst/>
+          </a:prstGeom>
+          <a:noFill/>
+        </p:spPr>
+        <p:txBody>
+          <a:bodyPr wrap="square" anchor="t">
+            <a:spAutoFit/>
+          </a:bodyPr>
+          <a:lstStyle/>
+          <a:p>
+            <a:pPr>
+              <a:spcAft>
+                <a:spcPts val="1800"/>
+              </a:spcAft>
+            </a:pPr>
+            <a:r>
+              <a:rPr sz="1900" b="1" i="0">
+                <a:solidFill>
+                  <a:srgbClr val="0E7C7B"/>
+                </a:solidFill>
+                <a:latin typeface="Avenir Next"/>
+              </a:rPr>
+              <a:t>•  </a:t>
+            </a:r>
+            <a:r>
+              <a:rPr sz="1900" b="0" i="0">
+                <a:solidFill>
+                  <a:srgbClr val="1B2025"/>
+                </a:solidFill>
+                <a:latin typeface="Avenir Next"/>
+              </a:rPr>
+              <a:t>Say why order matters for sequence data, and what RNNs/LSTMs did — a memory passed along the sequence — and their two limits (slow, forgetful)</a:t>
+            </a:r>
+          </a:p>
+          <a:p>
+            <a:pPr>
+              <a:spcAft>
+                <a:spcPts val="1800"/>
+              </a:spcAft>
+            </a:pPr>
+            <a:r>
+              <a:rPr sz="1900" b="1" i="0">
+                <a:solidFill>
+                  <a:srgbClr val="0E7C7B"/>
+                </a:solidFill>
+                <a:latin typeface="Avenir Next"/>
+              </a:rPr>
+              <a:t>•  </a:t>
+            </a:r>
+            <a:r>
+              <a:rPr sz="1900" b="0" i="0">
+                <a:solidFill>
+                  <a:srgbClr val="1B2025"/>
+                </a:solidFill>
+                <a:latin typeface="Avenir Next"/>
+              </a:rPr>
+              <a:t>Explain tokens and embeddings — a peptide is a sentence; each token becomes learned coordinates where similar things sit near each other</a:t>
+            </a:r>
+          </a:p>
+          <a:p>
+            <a:pPr>
+              <a:spcAft>
+                <a:spcPts val="1800"/>
+              </a:spcAft>
+            </a:pPr>
+            <a:r>
+              <a:rPr sz="1900" b="1" i="0">
+                <a:solidFill>
+                  <a:srgbClr val="0E7C7B"/>
+                </a:solidFill>
+                <a:latin typeface="Avenir Next"/>
+              </a:rPr>
+              <a:t>•  </a:t>
+            </a:r>
+            <a:r>
+              <a:rPr sz="1900" b="0" i="0">
+                <a:solidFill>
+                  <a:srgbClr val="1B2025"/>
+                </a:solidFill>
+                <a:latin typeface="Avenir Next"/>
+              </a:rPr>
+              <a:t>Define query, key and value rigorously — three learned projections, where query·key is a relevance score — and read an attention heat map (Quiz 7 Q1)</a:t>
+            </a:r>
+          </a:p>
+          <a:p>
+            <a:pPr>
+              <a:spcAft>
+                <a:spcPts val="1800"/>
+              </a:spcAft>
+            </a:pPr>
+            <a:r>
+              <a:rPr sz="1900" b="1" i="0">
+                <a:solidFill>
+                  <a:srgbClr val="0E7C7B"/>
+                </a:solidFill>
+                <a:latin typeface="Avenir Next"/>
+              </a:rPr>
+              <a:t>•  </a:t>
+            </a:r>
+            <a:r>
+              <a:rPr sz="1900" b="0" i="0">
+                <a:solidFill>
+                  <a:srgbClr val="1B2025"/>
+                </a:solidFill>
+                <a:latin typeface="Avenir Next"/>
+              </a:rPr>
+              <a:t>Run one attention head by hand — dot-product scores → softmax → weighted sum of the values (Quiz 7 Q2)</a:t>
+            </a:r>
+          </a:p>
+        </p:txBody>
+      </p:sp>
       <p:sp>
         <p:nvSpPr>
           <p:cNvPr id="6" name="Rectangle 5"/>
@@ -6664,18 +6691,18 @@
         </p:nvSpPr>
         <p:spPr>
           <a:xfrm>
-            <a:off x="548640" y="5212080"/>
+            <a:off x="548640" y="5379720"/>
             <a:ext cx="10515600" cy="1182624"/>
           </a:xfrm>
           <a:prstGeom prst="rect">
             <a:avLst/>
           </a:prstGeom>
           <a:solidFill>
-            <a:srgbClr val="E3F0EF"/>
+            <a:srgbClr val="F1F1EC"/>
           </a:solidFill>
           <a:ln w="12700">
             <a:solidFill>
-              <a:srgbClr val="0E7C7B"/>
+              <a:srgbClr val="3D444C"/>
             </a:solidFill>
           </a:ln>
           <a:effectLst/>
@@ -6700,22 +6727,13 @@
           <a:p>
             <a:pPr algn="ctr"/>
             <a:r>
-              <a:rPr sz="1200" b="1" i="0">
-                <a:solidFill>
-                  <a:srgbClr val="0E7C7B"/>
-                </a:solidFill>
-                <a:latin typeface="Menlo"/>
-              </a:rPr>
-              <a:t>MASS SPEC · </a:t>
-            </a:r>
-            <a:r>
               <a:rPr sz="1700" b="0" i="0">
                 <a:solidFill>
                   <a:srgbClr val="3D444C"/>
                 </a:solidFill>
                 <a:latin typeface="Avenir Next"/>
               </a:rPr>
-              <a:t>Recurrence (left): token 5 must wait for tokens 1–4 (slow), and early tokens fade over the chain (forgetful). Self-attention (right): all pairs at once (parallel — fast on a GPU) and any two tokens are one hop apart (long-range). Same two problems from the LSTM slide — both solved.</a:t>
+              <a:t>You have now worked both items on Quiz 7 live — the heat-map read (Q1) and one full attention head, scores → softmax → weighted values (Q2). The query/key/value roles you exercised inside Q2 are exactly what Lecture 8 assembles into the full transformer.</a:t>
             </a:r>
           </a:p>
         </p:txBody>
@@ -6811,314 +6829,6 @@
                 </a:solidFill>
                 <a:latin typeface="Menlo"/>
               </a:rPr>
-              <a:t>LECTURE 7 · WHAT YOU CAN DO NOW</a:t>
-            </a:r>
-          </a:p>
-        </p:txBody>
-      </p:sp>
-      <p:sp>
-        <p:nvSpPr>
-          <p:cNvPr id="4" name="TextBox 3"/>
-          <p:cNvSpPr txBox="1"/>
-          <p:nvPr/>
-        </p:nvSpPr>
-        <p:spPr>
-          <a:xfrm>
-            <a:off x="548640" y="731520"/>
-            <a:ext cx="11064240" cy="1005840"/>
-          </a:xfrm>
-          <a:prstGeom prst="rect">
-            <a:avLst/>
-          </a:prstGeom>
-          <a:noFill/>
-        </p:spPr>
-        <p:txBody>
-          <a:bodyPr wrap="square" anchor="t">
-            <a:spAutoFit/>
-          </a:bodyPr>
-          <a:lstStyle/>
-          <a:p>
-            <a:r>
-              <a:rPr sz="3400" b="1" i="0">
-                <a:solidFill>
-                  <a:srgbClr val="1B2025"/>
-                </a:solidFill>
-                <a:latin typeface="Avenir Next"/>
-              </a:rPr>
-              <a:t>You can now…</a:t>
-            </a:r>
-          </a:p>
-        </p:txBody>
-      </p:sp>
-      <p:sp>
-        <p:nvSpPr>
-          <p:cNvPr id="5" name="TextBox 4"/>
-          <p:cNvSpPr txBox="1"/>
-          <p:nvPr/>
-        </p:nvSpPr>
-        <p:spPr>
-          <a:xfrm>
-            <a:off x="548640" y="1920240"/>
-            <a:ext cx="10789920" cy="3444239"/>
-          </a:xfrm>
-          <a:prstGeom prst="rect">
-            <a:avLst/>
-          </a:prstGeom>
-          <a:noFill/>
-        </p:spPr>
-        <p:txBody>
-          <a:bodyPr wrap="square" anchor="t">
-            <a:spAutoFit/>
-          </a:bodyPr>
-          <a:lstStyle/>
-          <a:p>
-            <a:pPr>
-              <a:spcAft>
-                <a:spcPts val="1800"/>
-              </a:spcAft>
-            </a:pPr>
-            <a:r>
-              <a:rPr sz="2000" b="1" i="0">
-                <a:solidFill>
-                  <a:srgbClr val="0E7C7B"/>
-                </a:solidFill>
-                <a:latin typeface="Avenir Next"/>
-              </a:rPr>
-              <a:t>•  </a:t>
-            </a:r>
-            <a:r>
-              <a:rPr sz="2000" b="0" i="0">
-                <a:solidFill>
-                  <a:srgbClr val="1B2025"/>
-                </a:solidFill>
-                <a:latin typeface="Avenir Next"/>
-              </a:rPr>
-              <a:t>Say why order matters for sequence data, and what RNNs/LSTMs did — a memory passed along the sequence — and their two limits (slow, forgetful)</a:t>
-            </a:r>
-          </a:p>
-          <a:p>
-            <a:pPr>
-              <a:spcAft>
-                <a:spcPts val="1800"/>
-              </a:spcAft>
-            </a:pPr>
-            <a:r>
-              <a:rPr sz="2000" b="1" i="0">
-                <a:solidFill>
-                  <a:srgbClr val="0E7C7B"/>
-                </a:solidFill>
-                <a:latin typeface="Avenir Next"/>
-              </a:rPr>
-              <a:t>•  </a:t>
-            </a:r>
-            <a:r>
-              <a:rPr sz="2000" b="0" i="0">
-                <a:solidFill>
-                  <a:srgbClr val="1B2025"/>
-                </a:solidFill>
-                <a:latin typeface="Avenir Next"/>
-              </a:rPr>
-              <a:t>Explain tokens and embeddings — a peptide is a sentence; each token becomes learned coordinates where similar things sit near each other</a:t>
-            </a:r>
-          </a:p>
-          <a:p>
-            <a:pPr>
-              <a:spcAft>
-                <a:spcPts val="1800"/>
-              </a:spcAft>
-            </a:pPr>
-            <a:r>
-              <a:rPr sz="2000" b="1" i="0">
-                <a:solidFill>
-                  <a:srgbClr val="0E7C7B"/>
-                </a:solidFill>
-                <a:latin typeface="Avenir Next"/>
-              </a:rPr>
-              <a:t>•  </a:t>
-            </a:r>
-            <a:r>
-              <a:rPr sz="2000" b="0" i="0">
-                <a:solidFill>
-                  <a:srgbClr val="1B2025"/>
-                </a:solidFill>
-                <a:latin typeface="Avenir Next"/>
-              </a:rPr>
-              <a:t>Read an attention heat map and name the biggest attention (Quiz 7 Q1), and match the query/key/value lookup roles (Quiz 7 Q3)</a:t>
-            </a:r>
-          </a:p>
-          <a:p>
-            <a:pPr>
-              <a:spcAft>
-                <a:spcPts val="1800"/>
-              </a:spcAft>
-            </a:pPr>
-            <a:r>
-              <a:rPr sz="2000" b="1" i="0">
-                <a:solidFill>
-                  <a:srgbClr val="0E7C7B"/>
-                </a:solidFill>
-                <a:latin typeface="Avenir Next"/>
-              </a:rPr>
-              <a:t>•  </a:t>
-            </a:r>
-            <a:r>
-              <a:rPr sz="2000" b="0" i="0">
-                <a:solidFill>
-                  <a:srgbClr val="1B2025"/>
-                </a:solidFill>
-                <a:latin typeface="Avenir Next"/>
-              </a:rPr>
-              <a:t>Compute an attention output by hand — a weighted average of the values (Quiz 7 Q2)</a:t>
-            </a:r>
-          </a:p>
-        </p:txBody>
-      </p:sp>
-      <p:sp>
-        <p:nvSpPr>
-          <p:cNvPr id="6" name="Rectangle 5"/>
-          <p:cNvSpPr/>
-          <p:nvPr/>
-        </p:nvSpPr>
-        <p:spPr>
-          <a:xfrm>
-            <a:off x="548640" y="5501639"/>
-            <a:ext cx="10515600" cy="923544"/>
-          </a:xfrm>
-          <a:prstGeom prst="rect">
-            <a:avLst/>
-          </a:prstGeom>
-          <a:solidFill>
-            <a:srgbClr val="F1F1EC"/>
-          </a:solidFill>
-          <a:ln w="12700">
-            <a:solidFill>
-              <a:srgbClr val="3D444C"/>
-            </a:solidFill>
-          </a:ln>
-          <a:effectLst/>
-        </p:spPr>
-        <p:style>
-          <a:lnRef idx="1">
-            <a:schemeClr val="accent1"/>
-          </a:lnRef>
-          <a:fillRef idx="3">
-            <a:schemeClr val="accent1"/>
-          </a:fillRef>
-          <a:effectRef idx="2">
-            <a:schemeClr val="accent1"/>
-          </a:effectRef>
-          <a:fontRef idx="minor">
-            <a:schemeClr val="lt1"/>
-          </a:fontRef>
-        </p:style>
-        <p:txBody>
-          <a:bodyPr rtlCol="0" anchor="ctr" wrap="square" lIns="182880" rIns="182880"/>
-          <a:lstStyle/>
-          <a:p>
-            <a:pPr algn="ctr"/>
-            <a:r>
-              <a:rPr sz="1700" b="0" i="0">
-                <a:solidFill>
-                  <a:srgbClr val="3D444C"/>
-                </a:solidFill>
-                <a:latin typeface="Avenir Next"/>
-              </a:rPr>
-              <a:t>You have now worked every item on Quiz 7 live — the heat-map read (Q1), the weighted average (Q2), and the Q/K/V match (Q3). Keep the sheet — Lecture 8 builds the full transformer directly on top of this same lookup.</a:t>
-            </a:r>
-          </a:p>
-        </p:txBody>
-      </p:sp>
-    </p:spTree>
-  </p:cSld>
-  <p:clrMapOvr>
-    <a:masterClrMapping/>
-  </p:clrMapOvr>
-</p:sld>
-</file>
-
-<file path=ppt/slides/slide19.xml><?xml version="1.0" encoding="utf-8"?>
-<p:sld xmlns:a="http://schemas.openxmlformats.org/drawingml/2006/main" xmlns:p="http://schemas.openxmlformats.org/presentationml/2006/main" xmlns:r="http://schemas.openxmlformats.org/officeDocument/2006/relationships">
-  <p:cSld>
-    <p:spTree>
-      <p:nvGrpSpPr>
-        <p:cNvPr id="1" name=""/>
-        <p:cNvGrpSpPr/>
-        <p:nvPr/>
-      </p:nvGrpSpPr>
-      <p:grpSpPr/>
-      <p:sp>
-        <p:nvSpPr>
-          <p:cNvPr id="2" name="Rectangle 1"/>
-          <p:cNvSpPr/>
-          <p:nvPr/>
-        </p:nvSpPr>
-        <p:spPr>
-          <a:xfrm>
-            <a:off x="0" y="0"/>
-            <a:ext cx="12191695" cy="6858000"/>
-          </a:xfrm>
-          <a:prstGeom prst="rect">
-            <a:avLst/>
-          </a:prstGeom>
-          <a:solidFill>
-            <a:srgbClr val="FBFBF8"/>
-          </a:solidFill>
-          <a:ln>
-            <a:noFill/>
-          </a:ln>
-          <a:effectLst/>
-        </p:spPr>
-        <p:style>
-          <a:lnRef idx="1">
-            <a:schemeClr val="accent1"/>
-          </a:lnRef>
-          <a:fillRef idx="3">
-            <a:schemeClr val="accent1"/>
-          </a:fillRef>
-          <a:effectRef idx="2">
-            <a:schemeClr val="accent1"/>
-          </a:effectRef>
-          <a:fontRef idx="minor">
-            <a:schemeClr val="lt1"/>
-          </a:fontRef>
-        </p:style>
-        <p:txBody>
-          <a:bodyPr rtlCol="0" anchor="ctr"/>
-          <a:lstStyle/>
-          <a:p>
-            <a:pPr algn="ctr"/>
-          </a:p>
-        </p:txBody>
-      </p:sp>
-      <p:sp>
-        <p:nvSpPr>
-          <p:cNvPr id="3" name="TextBox 2"/>
-          <p:cNvSpPr txBox="1"/>
-          <p:nvPr/>
-        </p:nvSpPr>
-        <p:spPr>
-          <a:xfrm>
-            <a:off x="548640" y="320040"/>
-            <a:ext cx="10972800" cy="365760"/>
-          </a:xfrm>
-          <a:prstGeom prst="rect">
-            <a:avLst/>
-          </a:prstGeom>
-          <a:noFill/>
-        </p:spPr>
-        <p:txBody>
-          <a:bodyPr wrap="square" anchor="t">
-            <a:spAutoFit/>
-          </a:bodyPr>
-          <a:lstStyle/>
-          <a:p>
-            <a:r>
-              <a:rPr sz="1300" b="1" i="0">
-                <a:solidFill>
-                  <a:srgbClr val="8A9099"/>
-                </a:solidFill>
-                <a:latin typeface="Menlo"/>
-              </a:rPr>
               <a:t>LECTURE 7 · NEXT</a:t>
             </a:r>
           </a:p>
@@ -7586,7 +7296,7 @@
                 </a:solidFill>
                 <a:latin typeface="Avenir Next"/>
               </a:rPr>
-              <a:t>Self-attention — a soft lookup: query / key / value, heat maps, one weighted average</a:t>
+              <a:t>Self-attention — a soft lookup: query / key / value, heat maps, one full attention head by hand</a:t>
             </a:r>
             <a:r>
               <a:rPr sz="2100" b="0" i="0">
@@ -9119,7 +8829,7 @@
                 </a:solidFill>
                 <a:latin typeface="Avenir Next"/>
               </a:rPr>
-              <a:t>A soft lookup: query, key, value</a:t>
+              <a:t>Query, key, value: three learned projections</a:t>
             </a:r>
           </a:p>
         </p:txBody>
@@ -9140,8 +8850,8 @@
         </p:blipFill>
         <p:spPr>
           <a:xfrm>
-            <a:off x="1925537" y="1828800"/>
-            <a:ext cx="8310445" cy="3383280"/>
+            <a:off x="2480105" y="1828800"/>
+            <a:ext cx="7201310" cy="3358897"/>
           </a:xfrm>
           <a:prstGeom prst="rect">
             <a:avLst/>
@@ -9156,8 +8866,8 @@
         </p:nvSpPr>
         <p:spPr>
           <a:xfrm>
-            <a:off x="548640" y="5303520"/>
-            <a:ext cx="10515600" cy="1182624"/>
+            <a:off x="548640" y="5279137"/>
+            <a:ext cx="10515600" cy="1441703"/>
           </a:xfrm>
           <a:prstGeom prst="rect">
             <a:avLst/>
@@ -9198,7 +8908,7 @@
                 </a:solidFill>
                 <a:latin typeface="Avenir Next"/>
               </a:rPr>
-              <a:t>Every token carries three things. QUERY = what I'm looking for. KEY = what I contain, so others can decide if I'm relevant to them. VALUE = what I actually give you once you've decided I'm relevant. Match my query against every key → scores → softmax → weights → blend the values.</a:t>
+              <a:t>Each token is projected into three vectors by trained matrices: query q=x·W_Q, key k=x·W_K, value v=x·W_V. Define each by the operation it does: the QUERY is dotted against every KEY to score relevance (query·key = a compatibility score); softmax turns the scores into weights; the output is Σ weight × VALUE. It is a soft database lookup — match one query to all keys, read back a blend of the values.</a:t>
             </a:r>
           </a:p>
         </p:txBody>

--- a/slides/pptx/lecture07_attention.pptx
+++ b/slides/pptx/lecture07_attention.pptx
@@ -1513,7 +1513,7 @@
           <a:lstStyle/>
           <a:p>
             <a:r>
-              <a:t>First step for any sequence model: cut the input into TOKENS from a fixed vocabulary and give each an integer ID. For text the tokens are (roughly) words; for a peptide the natural tokens are amino acids — ACDEFG becomes six tokens A,C,D,E,F,G with IDs 1–6. The analogy to carry all hour: a peptide is a sentence and amino acids are its words. The 💬 pair prompt is a genuine hands-on beat (rule 8): tokenizing ACDEFG is trivial, but the real question is what the vocabulary should be once you allow modifications — the clean answer is that each modified residue simply gets its OWN token ID (phospho-S is a different "word" than S), which is exactly how protein language models like ESM handle it and how Casanovo (Lecture 8/Lab 3) treats residues. Harvest two or three vocabularies; there is no single right answer.</a:t>
+              <a:t>First step for any sequence model: cut the input into TOKENS from a fixed vocabulary and give each an integer ID. For text the tokens are (roughly) words; for a peptide the natural tokens are amino acids — ACDEFG becomes six tokens A,C,D,E,F,G with IDs 1–6. The analogy to carry all hour: a peptide is a sentence and amino acids are its words. The 💬 pair prompt is a genuine hands-on beat (rule 8): tokenizing ACDEFG is trivial, but the real question is what the vocabulary should be once you allow modifications — the clean answer is that each modified residue simply gets its OWN token ID (phospho-S is a different "word" than S), which is exactly how protein language models like ESM handle it, and how the peptide-sequencing transformers we build in Lecture 8 treat residues. Harvest two or three vocabularies; there is no single right answer.</a:t>
             </a:r>
           </a:p>
           <a:p/>
@@ -6961,7 +6961,7 @@
                 </a:solidFill>
                 <a:latin typeface="Avenir Next"/>
               </a:rPr>
-              <a:t>How a spectrum becomes tokens — patch it, CNN-encode it, or peak-as-token (Casanovo)</a:t>
+              <a:t>How a spectrum becomes tokens — patch it, CNN-encode it, or peak-as-token</a:t>
             </a:r>
           </a:p>
           <a:p>

--- a/slides/pptx/lecture07_attention.pptx
+++ b/slides/pptx/lecture07_attention.pptx
@@ -3094,38 +3094,6 @@
           </a:p>
         </p:txBody>
       </p:sp>
-      <p:pic>
-        <p:nvPicPr>
-          <p:cNvPr id="5" name="Content Placeholder 4">
-            <a:extLst>
-              <a:ext uri="{FF2B5EF4-FFF2-40B4-BE49-F238E27FC236}">
-                <a16:creationId xmlns:a16="http://schemas.microsoft.com/office/drawing/2014/main" id="{EA00C68C-D623-1CAB-1513-81677C0118DF}"/>
-              </a:ext>
-            </a:extLst>
-          </p:cNvPr>
-          <p:cNvPicPr>
-            <a:picLocks noGrp="1" noChangeAspect="1"/>
-          </p:cNvPicPr>
-          <p:nvPr>
-            <p:ph idx="1"/>
-          </p:nvPr>
-        </p:nvPicPr>
-        <p:blipFill>
-          <a:blip r:embed="rId2"/>
-          <a:stretch>
-            <a:fillRect/>
-          </a:stretch>
-        </p:blipFill>
-        <p:spPr>
-          <a:xfrm>
-            <a:off x="1552446" y="1615440"/>
-            <a:ext cx="7793988" cy="4922519"/>
-          </a:xfrm>
-          <a:prstGeom prst="rect">
-            <a:avLst/>
-          </a:prstGeom>
-        </p:spPr>
-      </p:pic>
       <p:sp>
         <p:nvSpPr>
           <p:cNvPr id="4" name="Text Placeholder 3">
@@ -3154,213 +3122,61 @@
           </a:p>
         </p:txBody>
       </p:sp>
-      <p:sp>
-        <p:nvSpPr>
-          <p:cNvPr id="6" name="Rounded Rectangle 5">
-            <a:extLst>
-              <a:ext uri="{FF2B5EF4-FFF2-40B4-BE49-F238E27FC236}">
-                <a16:creationId xmlns:a16="http://schemas.microsoft.com/office/drawing/2014/main" id="{084DC98F-3671-8BEB-2CD1-A44C4777665B}"/>
-              </a:ext>
-            </a:extLst>
-          </p:cNvPr>
-          <p:cNvSpPr/>
-          <p:nvPr/>
-        </p:nvSpPr>
-        <p:spPr>
-          <a:xfrm>
-            <a:off x="7525265" y="2570205"/>
-            <a:ext cx="1865870" cy="1210963"/>
-          </a:xfrm>
-          <a:prstGeom prst="roundRect">
+      <p:pic>
+        <p:nvPicPr>
+          <p:cNvPr id="15" name="Picture 14" descr="fig_qkv_projection.png"/>
+          <p:cNvPicPr>
+            <a:picLocks noChangeAspect="1"/>
+          </p:cNvPicPr>
+          <p:nvPr/>
+        </p:nvPicPr>
+        <p:blipFill>
+          <a:blip r:embed="rId3"/>
+          <a:stretch>
+            <a:fillRect/>
+          </a:stretch>
+        </p:blipFill>
+        <p:spPr>
+          <a:xfrm>
+            <a:off x="1722928" y="1828800"/>
+            <a:ext cx="8745837" cy="4160520"/>
+          </a:xfrm>
+          <a:prstGeom prst="rect">
+            <a:avLst/>
+          </a:prstGeom>
+        </p:spPr>
+      </p:pic>
+      <p:sp>
+        <p:nvSpPr>
+          <p:cNvPr id="16" name="TextBox 15"/>
+          <p:cNvSpPr txBox="1"/>
+          <p:nvPr/>
+        </p:nvSpPr>
+        <p:spPr>
+          <a:xfrm>
+            <a:off x="548640" y="6144768"/>
+            <a:ext cx="11091672" cy="310896"/>
+          </a:xfrm>
+          <a:prstGeom prst="rect">
             <a:avLst/>
           </a:prstGeom>
           <a:noFill/>
-          <a:ln w="28575">
-            <a:solidFill>
-              <a:srgbClr val="FF0000"/>
-            </a:solidFill>
-          </a:ln>
-        </p:spPr>
-        <p:style>
-          <a:lnRef idx="1">
-            <a:schemeClr val="accent1"/>
-          </a:lnRef>
-          <a:fillRef idx="3">
-            <a:schemeClr val="accent1"/>
-          </a:fillRef>
-          <a:effectRef idx="2">
-            <a:schemeClr val="accent1"/>
-          </a:effectRef>
-          <a:fontRef idx="minor">
-            <a:schemeClr val="lt1"/>
-          </a:fontRef>
-        </p:style>
-        <p:txBody>
-          <a:bodyPr rtlCol="0" anchor="ctr"/>
-          <a:lstStyle/>
-          <a:p>
-            <a:pPr algn="ctr"/>
-            <a:endParaRPr lang="en-US"/>
-          </a:p>
-        </p:txBody>
-      </p:sp>
-      <p:sp>
-        <p:nvSpPr>
-          <p:cNvPr id="7" name="Rounded Rectangle 6">
-            <a:extLst>
-              <a:ext uri="{FF2B5EF4-FFF2-40B4-BE49-F238E27FC236}">
-                <a16:creationId xmlns:a16="http://schemas.microsoft.com/office/drawing/2014/main" id="{FB7CD2EB-C228-A35E-6AF6-0A398EA29A2E}"/>
-              </a:ext>
-            </a:extLst>
-          </p:cNvPr>
-          <p:cNvSpPr/>
-          <p:nvPr/>
-        </p:nvSpPr>
-        <p:spPr>
-          <a:xfrm>
-            <a:off x="7525265" y="3948600"/>
-            <a:ext cx="1865870" cy="1210963"/>
-          </a:xfrm>
-          <a:prstGeom prst="roundRect">
-            <a:avLst/>
-          </a:prstGeom>
-          <a:noFill/>
-          <a:ln w="28575">
-            <a:solidFill>
-              <a:srgbClr val="FF0000"/>
-            </a:solidFill>
-          </a:ln>
-        </p:spPr>
-        <p:style>
-          <a:lnRef idx="1">
-            <a:schemeClr val="accent1"/>
-          </a:lnRef>
-          <a:fillRef idx="3">
-            <a:schemeClr val="accent1"/>
-          </a:fillRef>
-          <a:effectRef idx="2">
-            <a:schemeClr val="accent1"/>
-          </a:effectRef>
-          <a:fontRef idx="minor">
-            <a:schemeClr val="lt1"/>
-          </a:fontRef>
-        </p:style>
-        <p:txBody>
-          <a:bodyPr rtlCol="0" anchor="ctr"/>
-          <a:lstStyle/>
-          <a:p>
-            <a:pPr algn="ctr"/>
-            <a:endParaRPr lang="en-US"/>
-          </a:p>
-        </p:txBody>
-      </p:sp>
-      <p:sp>
-        <p:nvSpPr>
-          <p:cNvPr id="8" name="Rounded Rectangle 7">
-            <a:extLst>
-              <a:ext uri="{FF2B5EF4-FFF2-40B4-BE49-F238E27FC236}">
-                <a16:creationId xmlns:a16="http://schemas.microsoft.com/office/drawing/2014/main" id="{575A6296-8F29-06E8-32D9-4E1727FE3DD0}"/>
-              </a:ext>
-            </a:extLst>
-          </p:cNvPr>
-          <p:cNvSpPr/>
-          <p:nvPr/>
-        </p:nvSpPr>
-        <p:spPr>
-          <a:xfrm>
-            <a:off x="7525265" y="5326996"/>
-            <a:ext cx="1865870" cy="1210963"/>
-          </a:xfrm>
-          <a:prstGeom prst="roundRect">
-            <a:avLst/>
-          </a:prstGeom>
-          <a:noFill/>
-          <a:ln w="28575">
-            <a:solidFill>
-              <a:srgbClr val="FF0000"/>
-            </a:solidFill>
-          </a:ln>
-        </p:spPr>
-        <p:style>
-          <a:lnRef idx="1">
-            <a:schemeClr val="accent1"/>
-          </a:lnRef>
-          <a:fillRef idx="3">
-            <a:schemeClr val="accent1"/>
-          </a:fillRef>
-          <a:effectRef idx="2">
-            <a:schemeClr val="accent1"/>
-          </a:effectRef>
-          <a:fontRef idx="minor">
-            <a:schemeClr val="lt1"/>
-          </a:fontRef>
-        </p:style>
-        <p:txBody>
-          <a:bodyPr rtlCol="0" anchor="ctr"/>
-          <a:lstStyle/>
-          <a:p>
-            <a:pPr algn="ctr"/>
-            <a:endParaRPr lang="en-US"/>
-          </a:p>
-        </p:txBody>
-      </p:sp>
-      <p:sp>
-        <p:nvSpPr>
-          <p:cNvPr id="9" name="TextBox 8">
-            <a:extLst>
-              <a:ext uri="{FF2B5EF4-FFF2-40B4-BE49-F238E27FC236}">
-                <a16:creationId xmlns:a16="http://schemas.microsoft.com/office/drawing/2014/main" id="{463080A5-9E0D-CEFE-281E-E686B35E719C}"/>
-              </a:ext>
-            </a:extLst>
-          </p:cNvPr>
-          <p:cNvSpPr txBox="1"/>
-          <p:nvPr/>
-        </p:nvSpPr>
-        <p:spPr>
-          <a:xfrm>
-            <a:off x="6590750" y="6537959"/>
-            <a:ext cx="4490653" cy="307777"/>
-          </a:xfrm>
-          <a:prstGeom prst="rect">
-            <a:avLst/>
-          </a:prstGeom>
-          <a:noFill/>
-        </p:spPr>
-        <p:txBody>
-          <a:bodyPr wrap="none" rtlCol="0">
+        </p:spPr>
+        <p:txBody>
+          <a:bodyPr wrap="square">
             <a:spAutoFit/>
           </a:bodyPr>
           <a:lstStyle/>
           <a:p>
-            <a:r>
-              <a:rPr lang="en-US" sz="1400" i="1" dirty="0">
-                <a:solidFill>
-                  <a:schemeClr val="accent6">
-                    <a:lumMod val="75000"/>
-                  </a:schemeClr>
-                </a:solidFill>
-              </a:rPr>
-              <a:t>cc https://</a:t>
-            </a:r>
-            <a:r>
-              <a:rPr lang="en-US" sz="1400" i="1" dirty="0" err="1">
-                <a:solidFill>
-                  <a:schemeClr val="accent6">
-                    <a:lumMod val="75000"/>
-                  </a:schemeClr>
-                </a:solidFill>
-              </a:rPr>
-              <a:t>jalammar.github.io</a:t>
-            </a:r>
-            <a:r>
-              <a:rPr lang="en-US" sz="1400" i="1" dirty="0">
-                <a:solidFill>
-                  <a:schemeClr val="accent6">
-                    <a:lumMod val="75000"/>
-                  </a:schemeClr>
-                </a:solidFill>
-              </a:rPr>
-              <a:t>/illustrated-transformer/</a:t>
+            <a:pPr algn="ctr"/>
+            <a:r>
+              <a:rPr sz="1100">
+                <a:solidFill>
+                  <a:srgbClr val="8A9099"/>
+                </a:solidFill>
+                <a:latin typeface="Menlo"/>
+              </a:rPr>
+              <a:t>Course-drawn figure for MSACL DS301 · mechanism after Vaswani et al., NeurIPS 2017 (arXiv:1706.03762)</a:t>
             </a:r>
           </a:p>
         </p:txBody>
@@ -3657,7 +3473,7 @@
           <a:p>
             <a:r>
               <a:rPr lang="en-US" dirty="0"/>
-              <a:t>Self-Attention - Heap Map</a:t>
+              <a:t>Self-Attention - Heat Map</a:t>
             </a:r>
           </a:p>
         </p:txBody>
@@ -3714,7 +3530,11 @@
             <p:ph type="title"/>
           </p:nvPr>
         </p:nvSpPr>
-        <p:spPr/>
+        <p:spPr>
+          <a:xfrm>
+            <a:ext cx="0" cy="1207008"/>
+          </a:xfrm>
+        </p:spPr>
         <p:txBody>
           <a:bodyPr/>
           <a:lstStyle/>
@@ -3749,7 +3569,7 @@
           <a:p>
             <a:r>
               <a:rPr lang="en-US" dirty="0"/>
-              <a:t>Self-Attention - Heap Map</a:t>
+              <a:t>Self-Attention - Heat Map</a:t>
             </a:r>
           </a:p>
         </p:txBody>
@@ -5291,7 +5111,7 @@
         <p:spPr>
           <a:xfrm>
             <a:off x="548640" y="1920240"/>
-            <a:ext cx="10789920" cy="3985706"/>
+            <a:ext cx="10789920" cy="4194048"/>
           </a:xfrm>
           <a:prstGeom prst="rect">
             <a:avLst/>
@@ -6642,7 +6462,7 @@
         </p:blipFill>
         <p:spPr>
           <a:xfrm>
-            <a:off x="4399501" y="1837944"/>
+            <a:off x="4719541" y="1837944"/>
             <a:ext cx="6424693" cy="2855977"/>
           </a:xfrm>
           <a:prstGeom prst="rect">
@@ -7867,7 +7687,7 @@
         <p:spPr>
           <a:xfrm>
             <a:off x="548640" y="731520"/>
-            <a:ext cx="11064240" cy="615553"/>
+            <a:ext cx="11064240" cy="1146048"/>
           </a:xfrm>
           <a:prstGeom prst="rect">
             <a:avLst/>
@@ -7914,7 +7734,7 @@
         </p:blipFill>
         <p:spPr>
           <a:xfrm>
-            <a:off x="1523984" y="1828800"/>
+            <a:off x="1523984" y="1932432"/>
             <a:ext cx="9144000" cy="3291840"/>
           </a:xfrm>
           <a:prstGeom prst="rect">
@@ -7930,7 +7750,7 @@
         </p:nvSpPr>
         <p:spPr>
           <a:xfrm>
-            <a:off x="586635" y="4943856"/>
+            <a:off x="586635" y="5279136"/>
             <a:ext cx="10515600" cy="1182624"/>
           </a:xfrm>
           <a:prstGeom prst="rect">

--- a/slides/pptx/lecture07_attention.pptx
+++ b/slides/pptx/lecture07_attention.pptx
@@ -3094,6 +3094,38 @@
           </a:p>
         </p:txBody>
       </p:sp>
+      <p:pic>
+        <p:nvPicPr>
+          <p:cNvPr id="5" name="Content Placeholder 4">
+            <a:extLst>
+              <a:ext uri="{FF2B5EF4-FFF2-40B4-BE49-F238E27FC236}">
+                <a16:creationId xmlns:a16="http://schemas.microsoft.com/office/drawing/2014/main" id="{EA00C68C-D623-1CAB-1513-81677C0118DF}"/>
+              </a:ext>
+            </a:extLst>
+          </p:cNvPr>
+          <p:cNvPicPr>
+            <a:picLocks noGrp="1" noChangeAspect="1"/>
+          </p:cNvPicPr>
+          <p:nvPr>
+            <p:ph idx="1"/>
+          </p:nvPr>
+        </p:nvPicPr>
+        <p:blipFill>
+          <a:blip r:embed="rId2"/>
+          <a:stretch>
+            <a:fillRect/>
+          </a:stretch>
+        </p:blipFill>
+        <p:spPr>
+          <a:xfrm>
+            <a:off x="1552446" y="1615440"/>
+            <a:ext cx="7793988" cy="4922519"/>
+          </a:xfrm>
+          <a:prstGeom prst="rect">
+            <a:avLst/>
+          </a:prstGeom>
+        </p:spPr>
+      </p:pic>
       <p:sp>
         <p:nvSpPr>
           <p:cNvPr id="4" name="Text Placeholder 3">
@@ -3122,39 +3154,171 @@
           </a:p>
         </p:txBody>
       </p:sp>
-      <p:pic>
-        <p:nvPicPr>
-          <p:cNvPr id="15" name="Picture 14" descr="fig_qkv_projection.png"/>
-          <p:cNvPicPr>
-            <a:picLocks noChangeAspect="1"/>
-          </p:cNvPicPr>
-          <p:nvPr/>
-        </p:nvPicPr>
-        <p:blipFill>
-          <a:blip r:embed="rId3"/>
-          <a:stretch>
-            <a:fillRect/>
-          </a:stretch>
-        </p:blipFill>
-        <p:spPr>
-          <a:xfrm>
-            <a:off x="1722928" y="1828800"/>
-            <a:ext cx="8745837" cy="4160520"/>
-          </a:xfrm>
-          <a:prstGeom prst="rect">
-            <a:avLst/>
-          </a:prstGeom>
-        </p:spPr>
-      </p:pic>
-      <p:sp>
-        <p:nvSpPr>
-          <p:cNvPr id="16" name="TextBox 15"/>
+      <p:sp>
+        <p:nvSpPr>
+          <p:cNvPr id="6" name="Rounded Rectangle 5">
+            <a:extLst>
+              <a:ext uri="{FF2B5EF4-FFF2-40B4-BE49-F238E27FC236}">
+                <a16:creationId xmlns:a16="http://schemas.microsoft.com/office/drawing/2014/main" id="{084DC98F-3671-8BEB-2CD1-A44C4777665B}"/>
+              </a:ext>
+            </a:extLst>
+          </p:cNvPr>
+          <p:cNvSpPr/>
+          <p:nvPr/>
+        </p:nvSpPr>
+        <p:spPr>
+          <a:xfrm>
+            <a:off x="7525265" y="2570205"/>
+            <a:ext cx="1865870" cy="1210963"/>
+          </a:xfrm>
+          <a:prstGeom prst="roundRect">
+            <a:avLst/>
+          </a:prstGeom>
+          <a:noFill/>
+          <a:ln w="28575">
+            <a:solidFill>
+              <a:srgbClr val="FF0000"/>
+            </a:solidFill>
+          </a:ln>
+        </p:spPr>
+        <p:style>
+          <a:lnRef idx="1">
+            <a:schemeClr val="accent1"/>
+          </a:lnRef>
+          <a:fillRef idx="3">
+            <a:schemeClr val="accent1"/>
+          </a:fillRef>
+          <a:effectRef idx="2">
+            <a:schemeClr val="accent1"/>
+          </a:effectRef>
+          <a:fontRef idx="minor">
+            <a:schemeClr val="lt1"/>
+          </a:fontRef>
+        </p:style>
+        <p:txBody>
+          <a:bodyPr rtlCol="0" anchor="ctr"/>
+          <a:lstStyle/>
+          <a:p>
+            <a:pPr algn="ctr"/>
+            <a:endParaRPr lang="en-US"/>
+          </a:p>
+        </p:txBody>
+      </p:sp>
+      <p:sp>
+        <p:nvSpPr>
+          <p:cNvPr id="7" name="Rounded Rectangle 6">
+            <a:extLst>
+              <a:ext uri="{FF2B5EF4-FFF2-40B4-BE49-F238E27FC236}">
+                <a16:creationId xmlns:a16="http://schemas.microsoft.com/office/drawing/2014/main" id="{FB7CD2EB-C228-A35E-6AF6-0A398EA29A2E}"/>
+              </a:ext>
+            </a:extLst>
+          </p:cNvPr>
+          <p:cNvSpPr/>
+          <p:nvPr/>
+        </p:nvSpPr>
+        <p:spPr>
+          <a:xfrm>
+            <a:off x="7525265" y="3948600"/>
+            <a:ext cx="1865870" cy="1210963"/>
+          </a:xfrm>
+          <a:prstGeom prst="roundRect">
+            <a:avLst/>
+          </a:prstGeom>
+          <a:noFill/>
+          <a:ln w="28575">
+            <a:solidFill>
+              <a:srgbClr val="FF0000"/>
+            </a:solidFill>
+          </a:ln>
+        </p:spPr>
+        <p:style>
+          <a:lnRef idx="1">
+            <a:schemeClr val="accent1"/>
+          </a:lnRef>
+          <a:fillRef idx="3">
+            <a:schemeClr val="accent1"/>
+          </a:fillRef>
+          <a:effectRef idx="2">
+            <a:schemeClr val="accent1"/>
+          </a:effectRef>
+          <a:fontRef idx="minor">
+            <a:schemeClr val="lt1"/>
+          </a:fontRef>
+        </p:style>
+        <p:txBody>
+          <a:bodyPr rtlCol="0" anchor="ctr"/>
+          <a:lstStyle/>
+          <a:p>
+            <a:pPr algn="ctr"/>
+            <a:endParaRPr lang="en-US"/>
+          </a:p>
+        </p:txBody>
+      </p:sp>
+      <p:sp>
+        <p:nvSpPr>
+          <p:cNvPr id="8" name="Rounded Rectangle 7">
+            <a:extLst>
+              <a:ext uri="{FF2B5EF4-FFF2-40B4-BE49-F238E27FC236}">
+                <a16:creationId xmlns:a16="http://schemas.microsoft.com/office/drawing/2014/main" id="{575A6296-8F29-06E8-32D9-4E1727FE3DD0}"/>
+              </a:ext>
+            </a:extLst>
+          </p:cNvPr>
+          <p:cNvSpPr/>
+          <p:nvPr/>
+        </p:nvSpPr>
+        <p:spPr>
+          <a:xfrm>
+            <a:off x="7525265" y="5326996"/>
+            <a:ext cx="1865870" cy="1210963"/>
+          </a:xfrm>
+          <a:prstGeom prst="roundRect">
+            <a:avLst/>
+          </a:prstGeom>
+          <a:noFill/>
+          <a:ln w="28575">
+            <a:solidFill>
+              <a:srgbClr val="FF0000"/>
+            </a:solidFill>
+          </a:ln>
+        </p:spPr>
+        <p:style>
+          <a:lnRef idx="1">
+            <a:schemeClr val="accent1"/>
+          </a:lnRef>
+          <a:fillRef idx="3">
+            <a:schemeClr val="accent1"/>
+          </a:fillRef>
+          <a:effectRef idx="2">
+            <a:schemeClr val="accent1"/>
+          </a:effectRef>
+          <a:fontRef idx="minor">
+            <a:schemeClr val="lt1"/>
+          </a:fontRef>
+        </p:style>
+        <p:txBody>
+          <a:bodyPr rtlCol="0" anchor="ctr"/>
+          <a:lstStyle/>
+          <a:p>
+            <a:pPr algn="ctr"/>
+            <a:endParaRPr lang="en-US"/>
+          </a:p>
+        </p:txBody>
+      </p:sp>
+      <p:sp>
+        <p:nvSpPr>
+          <p:cNvPr id="9" name="TextBox 8">
+            <a:extLst>
+              <a:ext uri="{FF2B5EF4-FFF2-40B4-BE49-F238E27FC236}">
+                <a16:creationId xmlns:a16="http://schemas.microsoft.com/office/drawing/2014/main" id="{463080A5-9E0D-CEFE-281E-E686B35E719C}"/>
+              </a:ext>
+            </a:extLst>
+          </p:cNvPr>
           <p:cNvSpPr txBox="1"/>
           <p:nvPr/>
         </p:nvSpPr>
         <p:spPr>
           <a:xfrm>
-            <a:off x="548640" y="6144768"/>
+            <a:off x="548640" y="6455664"/>
             <a:ext cx="11091672" cy="310896"/>
           </a:xfrm>
           <a:prstGeom prst="rect">
@@ -3163,20 +3327,20 @@
           <a:noFill/>
         </p:spPr>
         <p:txBody>
-          <a:bodyPr wrap="square">
+          <a:bodyPr wrap="none" rtlCol="0">
             <a:spAutoFit/>
           </a:bodyPr>
           <a:lstStyle/>
           <a:p>
-            <a:pPr algn="ctr"/>
-            <a:r>
-              <a:rPr sz="1100">
-                <a:solidFill>
-                  <a:srgbClr val="8A9099"/>
-                </a:solidFill>
-                <a:latin typeface="Menlo"/>
-              </a:rPr>
-              <a:t>Course-drawn figure for MSACL DS301 · mechanism after Vaswani et al., NeurIPS 2017 (arXiv:1706.03762)</a:t>
+            <a:r>
+              <a:rPr lang="en-US" sz="1100" i="1" dirty="0">
+                <a:solidFill>
+                  <a:schemeClr val="accent6">
+                    <a:lumMod val="75000"/>
+                  </a:schemeClr>
+                </a:solidFill>
+              </a:rPr>
+              <a:t>source: Jay Alammar, “The Illustrated Transformer” — jalammar.github.io/illustrated-transformer/</a:t>
             </a:r>
           </a:p>
         </p:txBody>

--- a/slides/pptx/lecture07_attention.pptx
+++ b/slides/pptx/lecture07_attention.pptx
@@ -3694,11 +3694,7 @@
             <p:ph type="title"/>
           </p:nvPr>
         </p:nvSpPr>
-        <p:spPr>
-          <a:xfrm>
-            <a:ext cx="0" cy="1207008"/>
-          </a:xfrm>
-        </p:spPr>
+        <p:spPr/>
         <p:txBody>
           <a:bodyPr/>
           <a:lstStyle/>
@@ -3760,7 +3756,7 @@
         </p:blipFill>
         <p:spPr>
           <a:xfrm>
-            <a:off x="2394493" y="1625718"/>
+            <a:off x="2394493" y="1783080"/>
             <a:ext cx="7399965" cy="4665567"/>
           </a:xfrm>
           <a:prstGeom prst="rect">

--- a/slides/pptx/lecture07_attention.pptx
+++ b/slides/pptx/lecture07_attention.pptx
@@ -3340,7 +3340,7 @@
                   </a:schemeClr>
                 </a:solidFill>
               </a:rPr>
-              <a:t>source: Jay Alammar, “The Illustrated Transformer” — jalammar.github.io/illustrated-transformer/</a:t>
+              <a:t>source: Jay Alammar, “The Illustrated Transformer” (jalammar.github.io) · © the author; all rights reserved, not for redistribution</a:t>
             </a:r>
           </a:p>
         </p:txBody>

--- a/slides/pptx/lecture07_attention.pptx
+++ b/slides/pptx/lecture07_attention.pptx
@@ -3148,8 +3148,13 @@
           <a:lstStyle/>
           <a:p>
             <a:r>
-              <a:rPr lang="en-US" dirty="0"/>
-              <a:t>Self-Attention - QKV</a:t>
+              <a:rPr sz="1300" b="1" i="0">
+                <a:solidFill>
+                  <a:srgbClr val="8A9099"/>
+                </a:solidFill>
+                <a:latin typeface="Menlo"/>
+              </a:rPr>
+              <a:t>SELF-ATTENTION · GENERATING Q, K, V</a:t>
             </a:r>
           </a:p>
         </p:txBody>
@@ -3636,8 +3641,13 @@
           <a:lstStyle/>
           <a:p>
             <a:r>
-              <a:rPr lang="en-US" dirty="0"/>
-              <a:t>Self-Attention - Heat Map</a:t>
+              <a:rPr sz="1300" b="1" i="0">
+                <a:solidFill>
+                  <a:srgbClr val="8A9099"/>
+                </a:solidFill>
+                <a:latin typeface="Menlo"/>
+              </a:rPr>
+              <a:t>SELF-ATTENTION · SIMILARITY · 1 OF 2</a:t>
             </a:r>
           </a:p>
         </p:txBody>
@@ -3728,8 +3738,13 @@
           <a:lstStyle/>
           <a:p>
             <a:r>
-              <a:rPr lang="en-US" dirty="0"/>
-              <a:t>Self-Attention - Heat Map</a:t>
+              <a:rPr sz="1300" b="1" i="0">
+                <a:solidFill>
+                  <a:srgbClr val="8A9099"/>
+                </a:solidFill>
+                <a:latin typeface="Menlo"/>
+              </a:rPr>
+              <a:t>SELF-ATTENTION · SIMILARITY · 2 OF 2</a:t>
             </a:r>
           </a:p>
         </p:txBody>
@@ -5538,7 +5553,7 @@
                 </a:solidFill>
                 <a:latin typeface="Menlo"/>
               </a:rPr>
-              <a:t>WHY ATTENTION WON</a:t>
+              <a:t>SELF-ATTENTION · WHY IT WON</a:t>
             </a:r>
           </a:p>
         </p:txBody>
@@ -7350,8 +7365,13 @@
           <a:lstStyle/>
           <a:p>
             <a:r>
-              <a:rPr lang="en-US" dirty="0"/>
-              <a:t>Sequence Model intuition</a:t>
+              <a:rPr sz="1300" b="1" i="0">
+                <a:solidFill>
+                  <a:srgbClr val="8A9099"/>
+                </a:solidFill>
+                <a:latin typeface="Menlo"/>
+              </a:rPr>
+              <a:t>SEQUENCE MODELS · GETTING CONTEXT</a:t>
             </a:r>
           </a:p>
         </p:txBody>

--- a/slides/pptx/lecture07_attention.pptx
+++ b/slides/pptx/lecture07_attention.pptx
@@ -1110,11 +1110,12 @@
           <a:lstStyle/>
           <a:p>
             <a:r>
+              <a:rPr dirty="0"/>
               <a:t>The recurrent neural network (RNN) was the standard sequence model for years. Read the rolled form on the left: one cell with a loop — it feeds its own hidden state h back into itself. Unrolled on the right, it is that same cell copied at every time step, each step taking the next input xₜ and the previous memory hₜ₋₁ and emitting a new memory hₜ and an output oₜ. Two familiar ideas: it is weight sharing (the SAME cell at every step, like one convolution slid along the sequence), and the memory h is how information from early tokens is meant to reach later ones. Hold that "meant to" — it is exactly where the limits come from, two slides on.</a:t>
             </a:r>
           </a:p>
           <a:p>
-            <a:endParaRPr/>
+            <a:endParaRPr dirty="0"/>
           </a:p>
         </p:txBody>
       </p:sp>
@@ -7022,7 +7023,7 @@
           <a:p>
             <a:pPr algn="ctr"/>
             <a:r>
-              <a:rPr sz="1200" b="1" i="0">
+              <a:rPr sz="1200" b="1" i="0" dirty="0">
                 <a:solidFill>
                   <a:srgbClr val="E09E2F"/>
                 </a:solidFill>
@@ -7031,7 +7032,7 @@
               <a:t>PAIR · </a:t>
             </a:r>
             <a:r>
-              <a:rPr sz="1700" b="0" i="0">
+              <a:rPr sz="1700" b="0" i="0" dirty="0">
                 <a:solidFill>
                   <a:srgbClr val="3D444C"/>
                 </a:solidFill>
